--- a/proposal/올더베러_월별액션플랜_타임라인_1p.pptx
+++ b/proposal/올더베러_월별액션플랜_타임라인_1p.pptx
@@ -3090,60 +3090,20 @@
       <p:grpSpPr/>
       <p:sp>
         <p:nvSpPr>
-          <p:cNvPr id="2" name="TextBox 1"/>
-          <p:cNvSpPr txBox="1"/>
-          <p:nvPr/>
-        </p:nvSpPr>
-        <p:spPr>
-          <a:xfrm>
-            <a:off x="502920" y="256032"/>
-            <a:ext cx="11155680" cy="548640"/>
-          </a:xfrm>
-          <a:prstGeom prst="rect">
-            <a:avLst/>
-          </a:prstGeom>
-          <a:noFill/>
-        </p:spPr>
-        <p:txBody>
-          <a:bodyPr wrap="none" anchor="ctr" lIns="25400" rIns="25400" tIns="0" bIns="0">
-            <a:spAutoFit/>
-          </a:bodyPr>
-          <a:lstStyle/>
-          <a:p>
-            <a:pPr algn="l">
-              <a:lnSpc>
-                <a:spcPct val="100000"/>
-              </a:lnSpc>
-            </a:pPr>
-            <a:r>
-              <a:rPr sz="2500" b="1">
-                <a:solidFill>
-                  <a:srgbClr val="1A1A1A"/>
-                </a:solidFill>
-                <a:latin typeface="맑은 고딕"/>
-                <a:ea typeface="맑은 고딕"/>
-              </a:rPr>
-              <a:t>월별 실행 타임라인 · 액션플랜  —  견적 포함</a:t>
-            </a:r>
-          </a:p>
-        </p:txBody>
-      </p:sp>
-      <p:sp>
-        <p:nvSpPr>
-          <p:cNvPr id="3" name="Rectangle 2"/>
+          <p:cNvPr id="2" name="Rectangle 1"/>
           <p:cNvSpPr/>
           <p:nvPr/>
         </p:nvSpPr>
         <p:spPr>
           <a:xfrm>
-            <a:off x="521207" y="841248"/>
-            <a:ext cx="3108960" cy="41148"/>
-          </a:xfrm>
-          <a:prstGeom prst="rect">
-            <a:avLst/>
-          </a:prstGeom>
-          <a:solidFill>
-            <a:srgbClr val="0E5A30"/>
+            <a:off x="-91440" y="-91440"/>
+            <a:ext cx="12371832" cy="7040880"/>
+          </a:xfrm>
+          <a:prstGeom prst="rect">
+            <a:avLst/>
+          </a:prstGeom>
+          <a:solidFill>
+            <a:srgbClr val="F3F2E7"/>
           </a:solidFill>
           <a:ln>
             <a:noFill/>
@@ -3174,20 +3134,60 @@
       </p:sp>
       <p:sp>
         <p:nvSpPr>
+          <p:cNvPr id="3" name="TextBox 2"/>
+          <p:cNvSpPr txBox="1"/>
+          <p:nvPr/>
+        </p:nvSpPr>
+        <p:spPr>
+          <a:xfrm>
+            <a:off x="502920" y="256032"/>
+            <a:ext cx="11155680" cy="548640"/>
+          </a:xfrm>
+          <a:prstGeom prst="rect">
+            <a:avLst/>
+          </a:prstGeom>
+          <a:noFill/>
+        </p:spPr>
+        <p:txBody>
+          <a:bodyPr wrap="none" anchor="ctr" lIns="25400" rIns="25400" tIns="0" bIns="0">
+            <a:spAutoFit/>
+          </a:bodyPr>
+          <a:lstStyle/>
+          <a:p>
+            <a:pPr algn="l">
+              <a:lnSpc>
+                <a:spcPct val="100000"/>
+              </a:lnSpc>
+            </a:pPr>
+            <a:r>
+              <a:rPr sz="2500" b="1">
+                <a:solidFill>
+                  <a:srgbClr val="1A1A1A"/>
+                </a:solidFill>
+                <a:latin typeface="맑은 고딕"/>
+                <a:ea typeface="맑은 고딕"/>
+              </a:rPr>
+              <a:t>월별 실행 타임라인 · 액션플랜  —  견적 포함</a:t>
+            </a:r>
+          </a:p>
+        </p:txBody>
+      </p:sp>
+      <p:sp>
+        <p:nvSpPr>
           <p:cNvPr id="4" name="Rectangle 3"/>
           <p:cNvSpPr/>
           <p:nvPr/>
         </p:nvSpPr>
         <p:spPr>
           <a:xfrm>
-            <a:off x="3017520" y="950976"/>
-            <a:ext cx="3566160" cy="292608"/>
-          </a:xfrm>
-          <a:prstGeom prst="rect">
-            <a:avLst/>
-          </a:prstGeom>
-          <a:solidFill>
-            <a:srgbClr val="333333"/>
+            <a:off x="521207" y="841248"/>
+            <a:ext cx="3108960" cy="41148"/>
+          </a:xfrm>
+          <a:prstGeom prst="rect">
+            <a:avLst/>
+          </a:prstGeom>
+          <a:solidFill>
+            <a:srgbClr val="0E5A30"/>
           </a:solidFill>
           <a:ln>
             <a:noFill/>
@@ -3218,8 +3218,8 @@
       </p:sp>
       <p:sp>
         <p:nvSpPr>
-          <p:cNvPr id="5" name="TextBox 4"/>
-          <p:cNvSpPr txBox="1"/>
+          <p:cNvPr id="5" name="Rectangle 4"/>
+          <p:cNvSpPr/>
           <p:nvPr/>
         </p:nvSpPr>
         <p:spPr>
@@ -3230,48 +3230,8 @@
           <a:prstGeom prst="rect">
             <a:avLst/>
           </a:prstGeom>
-          <a:noFill/>
-        </p:spPr>
-        <p:txBody>
-          <a:bodyPr wrap="none" anchor="ctr" lIns="25400" rIns="25400" tIns="0" bIns="0">
-            <a:spAutoFit/>
-          </a:bodyPr>
-          <a:lstStyle/>
-          <a:p>
-            <a:pPr algn="ctr">
-              <a:lnSpc>
-                <a:spcPct val="100000"/>
-              </a:lnSpc>
-            </a:pPr>
-            <a:r>
-              <a:rPr sz="1150" b="1">
-                <a:solidFill>
-                  <a:srgbClr val="FFFFFF"/>
-                </a:solidFill>
-                <a:latin typeface="맑은 고딕"/>
-                <a:ea typeface="맑은 고딕"/>
-              </a:rPr>
-              <a:t>PHASE 1 · 빠른 반응 확보</a:t>
-            </a:r>
-          </a:p>
-        </p:txBody>
-      </p:sp>
-      <p:sp>
-        <p:nvSpPr>
-          <p:cNvPr id="6" name="Rectangle 5"/>
-          <p:cNvSpPr/>
-          <p:nvPr/>
-        </p:nvSpPr>
-        <p:spPr>
-          <a:xfrm>
-            <a:off x="6583680" y="950976"/>
-            <a:ext cx="3566160" cy="292608"/>
-          </a:xfrm>
-          <a:prstGeom prst="rect">
-            <a:avLst/>
-          </a:prstGeom>
-          <a:solidFill>
-            <a:srgbClr val="9C9C97"/>
+          <a:solidFill>
+            <a:srgbClr val="333333"/>
           </a:solidFill>
           <a:ln>
             <a:noFill/>
@@ -3302,13 +3262,13 @@
       </p:sp>
       <p:sp>
         <p:nvSpPr>
-          <p:cNvPr id="7" name="TextBox 6"/>
+          <p:cNvPr id="6" name="TextBox 5"/>
           <p:cNvSpPr txBox="1"/>
           <p:nvPr/>
         </p:nvSpPr>
         <p:spPr>
           <a:xfrm>
-            <a:off x="6583680" y="950976"/>
+            <a:off x="3017520" y="950976"/>
             <a:ext cx="3566160" cy="292608"/>
           </a:xfrm>
           <a:prstGeom prst="rect">
@@ -3335,27 +3295,27 @@
                 <a:latin typeface="맑은 고딕"/>
                 <a:ea typeface="맑은 고딕"/>
               </a:rPr>
-              <a:t>PHASE 2 · 대표성 확장</a:t>
-            </a:r>
-          </a:p>
-        </p:txBody>
-      </p:sp>
-      <p:sp>
-        <p:nvSpPr>
-          <p:cNvPr id="8" name="Rectangle 7"/>
+              <a:t>PHASE 1 · 빠른 반응 확보</a:t>
+            </a:r>
+          </a:p>
+        </p:txBody>
+      </p:sp>
+      <p:sp>
+        <p:nvSpPr>
+          <p:cNvPr id="7" name="Rectangle 6"/>
           <p:cNvSpPr/>
           <p:nvPr/>
         </p:nvSpPr>
         <p:spPr>
           <a:xfrm>
-            <a:off x="502920" y="1280160"/>
-            <a:ext cx="2514600" cy="365760"/>
-          </a:xfrm>
-          <a:prstGeom prst="rect">
-            <a:avLst/>
-          </a:prstGeom>
-          <a:solidFill>
-            <a:srgbClr val="202020"/>
+            <a:off x="6583680" y="950976"/>
+            <a:ext cx="3566160" cy="292608"/>
+          </a:xfrm>
+          <a:prstGeom prst="rect">
+            <a:avLst/>
+          </a:prstGeom>
+          <a:solidFill>
+            <a:srgbClr val="9C9C97"/>
           </a:solidFill>
           <a:ln>
             <a:noFill/>
@@ -3386,14 +3346,14 @@
       </p:sp>
       <p:sp>
         <p:nvSpPr>
-          <p:cNvPr id="9" name="TextBox 8"/>
+          <p:cNvPr id="8" name="TextBox 7"/>
           <p:cNvSpPr txBox="1"/>
           <p:nvPr/>
         </p:nvSpPr>
         <p:spPr>
           <a:xfrm>
-            <a:off x="502920" y="1280160"/>
-            <a:ext cx="2514600" cy="365760"/>
+            <a:off x="6583680" y="950976"/>
+            <a:ext cx="3566160" cy="292608"/>
           </a:xfrm>
           <a:prstGeom prst="rect">
             <a:avLst/>
@@ -3406,34 +3366,34 @@
           </a:bodyPr>
           <a:lstStyle/>
           <a:p>
-            <a:pPr algn="l">
-              <a:lnSpc>
-                <a:spcPct val="100000"/>
-              </a:lnSpc>
-            </a:pPr>
-            <a:r>
-              <a:rPr sz="1100" b="1">
+            <a:pPr algn="ctr">
+              <a:lnSpc>
+                <a:spcPct val="100000"/>
+              </a:lnSpc>
+            </a:pPr>
+            <a:r>
+              <a:rPr sz="1150" b="1">
                 <a:solidFill>
                   <a:srgbClr val="FFFFFF"/>
                 </a:solidFill>
                 <a:latin typeface="맑은 고딕"/>
                 <a:ea typeface="맑은 고딕"/>
               </a:rPr>
-              <a:t>항목  (건당 비용)</a:t>
-            </a:r>
-          </a:p>
-        </p:txBody>
-      </p:sp>
-      <p:sp>
-        <p:nvSpPr>
-          <p:cNvPr id="10" name="Rectangle 9"/>
+              <a:t>PHASE 2 · 대표성 확장</a:t>
+            </a:r>
+          </a:p>
+        </p:txBody>
+      </p:sp>
+      <p:sp>
+        <p:nvSpPr>
+          <p:cNvPr id="9" name="Rectangle 8"/>
           <p:cNvSpPr/>
           <p:nvPr/>
         </p:nvSpPr>
         <p:spPr>
           <a:xfrm>
-            <a:off x="3017520" y="1280160"/>
-            <a:ext cx="1188720" cy="365760"/>
+            <a:off x="502920" y="1280160"/>
+            <a:ext cx="2514600" cy="365760"/>
           </a:xfrm>
           <a:prstGeom prst="rect">
             <a:avLst/>
@@ -3470,14 +3430,14 @@
       </p:sp>
       <p:sp>
         <p:nvSpPr>
-          <p:cNvPr id="11" name="TextBox 10"/>
+          <p:cNvPr id="10" name="TextBox 9"/>
           <p:cNvSpPr txBox="1"/>
           <p:nvPr/>
         </p:nvSpPr>
         <p:spPr>
           <a:xfrm>
-            <a:off x="3017520" y="1280160"/>
-            <a:ext cx="1188720" cy="365760"/>
+            <a:off x="502920" y="1280160"/>
+            <a:ext cx="2514600" cy="365760"/>
           </a:xfrm>
           <a:prstGeom prst="rect">
             <a:avLst/>
@@ -3490,33 +3450,33 @@
           </a:bodyPr>
           <a:lstStyle/>
           <a:p>
-            <a:pPr algn="ctr">
-              <a:lnSpc>
-                <a:spcPct val="100000"/>
-              </a:lnSpc>
-            </a:pPr>
-            <a:r>
-              <a:rPr sz="1150" b="1">
+            <a:pPr algn="l">
+              <a:lnSpc>
+                <a:spcPct val="100000"/>
+              </a:lnSpc>
+            </a:pPr>
+            <a:r>
+              <a:rPr sz="1100" b="1">
                 <a:solidFill>
                   <a:srgbClr val="FFFFFF"/>
                 </a:solidFill>
                 <a:latin typeface="맑은 고딕"/>
                 <a:ea typeface="맑은 고딕"/>
               </a:rPr>
-              <a:t>7월</a:t>
-            </a:r>
-          </a:p>
-        </p:txBody>
-      </p:sp>
-      <p:sp>
-        <p:nvSpPr>
-          <p:cNvPr id="12" name="Rectangle 11"/>
+              <a:t>항목  (건당 비용)</a:t>
+            </a:r>
+          </a:p>
+        </p:txBody>
+      </p:sp>
+      <p:sp>
+        <p:nvSpPr>
+          <p:cNvPr id="11" name="Rectangle 10"/>
           <p:cNvSpPr/>
           <p:nvPr/>
         </p:nvSpPr>
         <p:spPr>
           <a:xfrm>
-            <a:off x="4206240" y="1280160"/>
+            <a:off x="3017520" y="1280160"/>
             <a:ext cx="1188720" cy="365760"/>
           </a:xfrm>
           <a:prstGeom prst="rect">
@@ -3554,13 +3514,13 @@
       </p:sp>
       <p:sp>
         <p:nvSpPr>
-          <p:cNvPr id="13" name="TextBox 12"/>
+          <p:cNvPr id="12" name="TextBox 11"/>
           <p:cNvSpPr txBox="1"/>
           <p:nvPr/>
         </p:nvSpPr>
         <p:spPr>
           <a:xfrm>
-            <a:off x="4206240" y="1280160"/>
+            <a:off x="3017520" y="1280160"/>
             <a:ext cx="1188720" cy="365760"/>
           </a:xfrm>
           <a:prstGeom prst="rect">
@@ -3587,37 +3547,20 @@
                 <a:latin typeface="맑은 고딕"/>
                 <a:ea typeface="맑은 고딕"/>
               </a:rPr>
-              <a:t>8월</a:t>
-            </a:r>
-          </a:p>
-          <a:p>
-            <a:pPr algn="ctr">
-              <a:lnSpc>
-                <a:spcPct val="100000"/>
-              </a:lnSpc>
-            </a:pPr>
-            <a:r>
-              <a:rPr sz="800" b="0">
-                <a:solidFill>
-                  <a:srgbClr val="CFCFCB"/>
-                </a:solidFill>
-                <a:latin typeface="맑은 고딕"/>
-                <a:ea typeface="맑은 고딕"/>
-              </a:rPr>
-              <a:t>세일 사전</a:t>
-            </a:r>
-          </a:p>
-        </p:txBody>
-      </p:sp>
-      <p:sp>
-        <p:nvSpPr>
-          <p:cNvPr id="14" name="Rectangle 13"/>
+              <a:t>7월</a:t>
+            </a:r>
+          </a:p>
+        </p:txBody>
+      </p:sp>
+      <p:sp>
+        <p:nvSpPr>
+          <p:cNvPr id="13" name="Rectangle 12"/>
           <p:cNvSpPr/>
           <p:nvPr/>
         </p:nvSpPr>
         <p:spPr>
           <a:xfrm>
-            <a:off x="5394960" y="1280160"/>
+            <a:off x="4206240" y="1280160"/>
             <a:ext cx="1188720" cy="365760"/>
           </a:xfrm>
           <a:prstGeom prst="rect">
@@ -3655,13 +3598,13 @@
       </p:sp>
       <p:sp>
         <p:nvSpPr>
-          <p:cNvPr id="15" name="TextBox 14"/>
+          <p:cNvPr id="14" name="TextBox 13"/>
           <p:cNvSpPr txBox="1"/>
           <p:nvPr/>
         </p:nvSpPr>
         <p:spPr>
           <a:xfrm>
-            <a:off x="5394960" y="1280160"/>
+            <a:off x="4206240" y="1280160"/>
             <a:ext cx="1188720" cy="365760"/>
           </a:xfrm>
           <a:prstGeom prst="rect">
@@ -3688,7 +3631,7 @@
                 <a:latin typeface="맑은 고딕"/>
                 <a:ea typeface="맑은 고딕"/>
               </a:rPr>
-              <a:t>9월</a:t>
+              <a:t>8월</a:t>
             </a:r>
           </a:p>
           <a:p>
@@ -3705,20 +3648,20 @@
                 <a:latin typeface="맑은 고딕"/>
                 <a:ea typeface="맑은 고딕"/>
               </a:rPr>
-              <a:t>세일 ★</a:t>
-            </a:r>
-          </a:p>
-        </p:txBody>
-      </p:sp>
-      <p:sp>
-        <p:nvSpPr>
-          <p:cNvPr id="16" name="Rectangle 15"/>
+              <a:t>세일 사전</a:t>
+            </a:r>
+          </a:p>
+        </p:txBody>
+      </p:sp>
+      <p:sp>
+        <p:nvSpPr>
+          <p:cNvPr id="15" name="Rectangle 14"/>
           <p:cNvSpPr/>
           <p:nvPr/>
         </p:nvSpPr>
         <p:spPr>
           <a:xfrm>
-            <a:off x="6583680" y="1280160"/>
+            <a:off x="5394960" y="1280160"/>
             <a:ext cx="1188720" cy="365760"/>
           </a:xfrm>
           <a:prstGeom prst="rect">
@@ -3756,13 +3699,13 @@
       </p:sp>
       <p:sp>
         <p:nvSpPr>
-          <p:cNvPr id="17" name="TextBox 16"/>
+          <p:cNvPr id="16" name="TextBox 15"/>
           <p:cNvSpPr txBox="1"/>
           <p:nvPr/>
         </p:nvSpPr>
         <p:spPr>
           <a:xfrm>
-            <a:off x="6583680" y="1280160"/>
+            <a:off x="5394960" y="1280160"/>
             <a:ext cx="1188720" cy="365760"/>
           </a:xfrm>
           <a:prstGeom prst="rect">
@@ -3789,20 +3732,37 @@
                 <a:latin typeface="맑은 고딕"/>
                 <a:ea typeface="맑은 고딕"/>
               </a:rPr>
-              <a:t>10월</a:t>
-            </a:r>
-          </a:p>
-        </p:txBody>
-      </p:sp>
-      <p:sp>
-        <p:nvSpPr>
-          <p:cNvPr id="18" name="Rectangle 17"/>
+              <a:t>9월</a:t>
+            </a:r>
+          </a:p>
+          <a:p>
+            <a:pPr algn="ctr">
+              <a:lnSpc>
+                <a:spcPct val="100000"/>
+              </a:lnSpc>
+            </a:pPr>
+            <a:r>
+              <a:rPr sz="800" b="0">
+                <a:solidFill>
+                  <a:srgbClr val="CFCFCB"/>
+                </a:solidFill>
+                <a:latin typeface="맑은 고딕"/>
+                <a:ea typeface="맑은 고딕"/>
+              </a:rPr>
+              <a:t>세일 ★</a:t>
+            </a:r>
+          </a:p>
+        </p:txBody>
+      </p:sp>
+      <p:sp>
+        <p:nvSpPr>
+          <p:cNvPr id="17" name="Rectangle 16"/>
           <p:cNvSpPr/>
           <p:nvPr/>
         </p:nvSpPr>
         <p:spPr>
           <a:xfrm>
-            <a:off x="7772400" y="1280160"/>
+            <a:off x="6583680" y="1280160"/>
             <a:ext cx="1188720" cy="365760"/>
           </a:xfrm>
           <a:prstGeom prst="rect">
@@ -3840,13 +3800,13 @@
       </p:sp>
       <p:sp>
         <p:nvSpPr>
-          <p:cNvPr id="19" name="TextBox 18"/>
+          <p:cNvPr id="18" name="TextBox 17"/>
           <p:cNvSpPr txBox="1"/>
           <p:nvPr/>
         </p:nvSpPr>
         <p:spPr>
           <a:xfrm>
-            <a:off x="7772400" y="1280160"/>
+            <a:off x="6583680" y="1280160"/>
             <a:ext cx="1188720" cy="365760"/>
           </a:xfrm>
           <a:prstGeom prst="rect">
@@ -3873,37 +3833,20 @@
                 <a:latin typeface="맑은 고딕"/>
                 <a:ea typeface="맑은 고딕"/>
               </a:rPr>
-              <a:t>11월</a:t>
-            </a:r>
-          </a:p>
-          <a:p>
-            <a:pPr algn="ctr">
-              <a:lnSpc>
-                <a:spcPct val="100000"/>
-              </a:lnSpc>
-            </a:pPr>
-            <a:r>
-              <a:rPr sz="800" b="0">
-                <a:solidFill>
-                  <a:srgbClr val="CFCFCB"/>
-                </a:solidFill>
-                <a:latin typeface="맑은 고딕"/>
-                <a:ea typeface="맑은 고딕"/>
-              </a:rPr>
-              <a:t>블프 ★</a:t>
-            </a:r>
-          </a:p>
-        </p:txBody>
-      </p:sp>
-      <p:sp>
-        <p:nvSpPr>
-          <p:cNvPr id="20" name="Rectangle 19"/>
+              <a:t>10월</a:t>
+            </a:r>
+          </a:p>
+        </p:txBody>
+      </p:sp>
+      <p:sp>
+        <p:nvSpPr>
+          <p:cNvPr id="19" name="Rectangle 18"/>
           <p:cNvSpPr/>
           <p:nvPr/>
         </p:nvSpPr>
         <p:spPr>
           <a:xfrm>
-            <a:off x="8961120" y="1280160"/>
+            <a:off x="7772400" y="1280160"/>
             <a:ext cx="1188720" cy="365760"/>
           </a:xfrm>
           <a:prstGeom prst="rect">
@@ -3941,13 +3884,13 @@
       </p:sp>
       <p:sp>
         <p:nvSpPr>
-          <p:cNvPr id="21" name="TextBox 20"/>
+          <p:cNvPr id="20" name="TextBox 19"/>
           <p:cNvSpPr txBox="1"/>
           <p:nvPr/>
         </p:nvSpPr>
         <p:spPr>
           <a:xfrm>
-            <a:off x="8961120" y="1280160"/>
+            <a:off x="7772400" y="1280160"/>
             <a:ext cx="1188720" cy="365760"/>
           </a:xfrm>
           <a:prstGeom prst="rect">
@@ -3974,7 +3917,7 @@
                 <a:latin typeface="맑은 고딕"/>
                 <a:ea typeface="맑은 고딕"/>
               </a:rPr>
-              <a:t>12월</a:t>
+              <a:t>11월</a:t>
             </a:r>
           </a:p>
           <a:p>
@@ -3991,21 +3934,21 @@
                 <a:latin typeface="맑은 고딕"/>
                 <a:ea typeface="맑은 고딕"/>
               </a:rPr>
-              <a:t>세일 ★</a:t>
-            </a:r>
-          </a:p>
-        </p:txBody>
-      </p:sp>
-      <p:sp>
-        <p:nvSpPr>
-          <p:cNvPr id="22" name="Rectangle 21"/>
+              <a:t>블프 ★</a:t>
+            </a:r>
+          </a:p>
+        </p:txBody>
+      </p:sp>
+      <p:sp>
+        <p:nvSpPr>
+          <p:cNvPr id="21" name="Rectangle 20"/>
           <p:cNvSpPr/>
           <p:nvPr/>
         </p:nvSpPr>
         <p:spPr>
           <a:xfrm>
-            <a:off x="10149840" y="1280160"/>
-            <a:ext cx="1536192" cy="365760"/>
+            <a:off x="8961120" y="1280160"/>
+            <a:ext cx="1188720" cy="365760"/>
           </a:xfrm>
           <a:prstGeom prst="rect">
             <a:avLst/>
@@ -4042,14 +3985,14 @@
       </p:sp>
       <p:sp>
         <p:nvSpPr>
-          <p:cNvPr id="23" name="TextBox 22"/>
+          <p:cNvPr id="22" name="TextBox 21"/>
           <p:cNvSpPr txBox="1"/>
           <p:nvPr/>
         </p:nvSpPr>
         <p:spPr>
           <a:xfrm>
-            <a:off x="10149840" y="1280160"/>
-            <a:ext cx="1536192" cy="365760"/>
+            <a:off x="8961120" y="1280160"/>
+            <a:ext cx="1188720" cy="365760"/>
           </a:xfrm>
           <a:prstGeom prst="rect">
             <a:avLst/>
@@ -4075,6 +4018,107 @@
                 <a:latin typeface="맑은 고딕"/>
                 <a:ea typeface="맑은 고딕"/>
               </a:rPr>
+              <a:t>12월</a:t>
+            </a:r>
+          </a:p>
+          <a:p>
+            <a:pPr algn="ctr">
+              <a:lnSpc>
+                <a:spcPct val="100000"/>
+              </a:lnSpc>
+            </a:pPr>
+            <a:r>
+              <a:rPr sz="800" b="0">
+                <a:solidFill>
+                  <a:srgbClr val="CFCFCB"/>
+                </a:solidFill>
+                <a:latin typeface="맑은 고딕"/>
+                <a:ea typeface="맑은 고딕"/>
+              </a:rPr>
+              <a:t>세일 ★</a:t>
+            </a:r>
+          </a:p>
+        </p:txBody>
+      </p:sp>
+      <p:sp>
+        <p:nvSpPr>
+          <p:cNvPr id="23" name="Rectangle 22"/>
+          <p:cNvSpPr/>
+          <p:nvPr/>
+        </p:nvSpPr>
+        <p:spPr>
+          <a:xfrm>
+            <a:off x="10149840" y="1280160"/>
+            <a:ext cx="1536192" cy="365760"/>
+          </a:xfrm>
+          <a:prstGeom prst="rect">
+            <a:avLst/>
+          </a:prstGeom>
+          <a:solidFill>
+            <a:srgbClr val="202020"/>
+          </a:solidFill>
+          <a:ln>
+            <a:noFill/>
+          </a:ln>
+          <a:effectLst/>
+        </p:spPr>
+        <p:style>
+          <a:lnRef idx="1">
+            <a:schemeClr val="accent1"/>
+          </a:lnRef>
+          <a:fillRef idx="3">
+            <a:schemeClr val="accent1"/>
+          </a:fillRef>
+          <a:effectRef idx="2">
+            <a:schemeClr val="accent1"/>
+          </a:effectRef>
+          <a:fontRef idx="minor">
+            <a:schemeClr val="lt1"/>
+          </a:fontRef>
+        </p:style>
+        <p:txBody>
+          <a:bodyPr rtlCol="0" anchor="ctr"/>
+          <a:lstStyle/>
+          <a:p>
+            <a:pPr algn="ctr"/>
+          </a:p>
+        </p:txBody>
+      </p:sp>
+      <p:sp>
+        <p:nvSpPr>
+          <p:cNvPr id="24" name="TextBox 23"/>
+          <p:cNvSpPr txBox="1"/>
+          <p:nvPr/>
+        </p:nvSpPr>
+        <p:spPr>
+          <a:xfrm>
+            <a:off x="10149840" y="1280160"/>
+            <a:ext cx="1536192" cy="365760"/>
+          </a:xfrm>
+          <a:prstGeom prst="rect">
+            <a:avLst/>
+          </a:prstGeom>
+          <a:noFill/>
+        </p:spPr>
+        <p:txBody>
+          <a:bodyPr wrap="none" anchor="ctr" lIns="25400" rIns="25400" tIns="0" bIns="0">
+            <a:spAutoFit/>
+          </a:bodyPr>
+          <a:lstStyle/>
+          <a:p>
+            <a:pPr algn="ctr">
+              <a:lnSpc>
+                <a:spcPct val="100000"/>
+              </a:lnSpc>
+            </a:pPr>
+            <a:r>
+              <a:rPr sz="1150" b="1">
+                <a:solidFill>
+                  <a:srgbClr val="FFFFFF"/>
+                </a:solidFill>
+                <a:latin typeface="맑은 고딕"/>
+                <a:ea typeface="맑은 고딕"/>
+              </a:rPr>
               <a:t>합계</a:t>
             </a:r>
           </a:p>
@@ -4082,7 +4126,7 @@
       </p:sp>
       <p:sp>
         <p:nvSpPr>
-          <p:cNvPr id="24" name="Rectangle 23"/>
+          <p:cNvPr id="25" name="Rectangle 24"/>
           <p:cNvSpPr/>
           <p:nvPr/>
         </p:nvSpPr>
@@ -4128,7 +4172,7 @@
       </p:sp>
       <p:sp>
         <p:nvSpPr>
-          <p:cNvPr id="25" name="TextBox 24"/>
+          <p:cNvPr id="26" name="TextBox 25"/>
           <p:cNvSpPr txBox="1"/>
           <p:nvPr/>
         </p:nvSpPr>
@@ -4168,7 +4212,7 @@
       </p:sp>
       <p:sp>
         <p:nvSpPr>
-          <p:cNvPr id="26" name="Rectangle 25"/>
+          <p:cNvPr id="27" name="Rectangle 26"/>
           <p:cNvSpPr/>
           <p:nvPr/>
         </p:nvSpPr>
@@ -4214,7 +4258,7 @@
       </p:sp>
       <p:sp>
         <p:nvSpPr>
-          <p:cNvPr id="27" name="TextBox 26"/>
+          <p:cNvPr id="28" name="TextBox 27"/>
           <p:cNvSpPr txBox="1"/>
           <p:nvPr/>
         </p:nvSpPr>
@@ -4271,7 +4315,7 @@
       </p:sp>
       <p:sp>
         <p:nvSpPr>
-          <p:cNvPr id="28" name="Rectangle 27"/>
+          <p:cNvPr id="29" name="Rectangle 28"/>
           <p:cNvSpPr/>
           <p:nvPr/>
         </p:nvSpPr>
@@ -4317,7 +4361,7 @@
       </p:sp>
       <p:sp>
         <p:nvSpPr>
-          <p:cNvPr id="29" name="TextBox 28"/>
+          <p:cNvPr id="30" name="TextBox 29"/>
           <p:cNvSpPr txBox="1"/>
           <p:nvPr/>
         </p:nvSpPr>
@@ -4357,7 +4401,7 @@
       </p:sp>
       <p:sp>
         <p:nvSpPr>
-          <p:cNvPr id="30" name="Rectangle 29"/>
+          <p:cNvPr id="31" name="Rectangle 30"/>
           <p:cNvSpPr/>
           <p:nvPr/>
         </p:nvSpPr>
@@ -4403,7 +4447,7 @@
       </p:sp>
       <p:sp>
         <p:nvSpPr>
-          <p:cNvPr id="31" name="TextBox 30"/>
+          <p:cNvPr id="32" name="TextBox 31"/>
           <p:cNvSpPr txBox="1"/>
           <p:nvPr/>
         </p:nvSpPr>
@@ -4443,7 +4487,7 @@
       </p:sp>
       <p:sp>
         <p:nvSpPr>
-          <p:cNvPr id="32" name="Rectangle 31"/>
+          <p:cNvPr id="33" name="Rectangle 32"/>
           <p:cNvSpPr/>
           <p:nvPr/>
         </p:nvSpPr>
@@ -4489,7 +4533,7 @@
       </p:sp>
       <p:sp>
         <p:nvSpPr>
-          <p:cNvPr id="33" name="TextBox 32"/>
+          <p:cNvPr id="34" name="TextBox 33"/>
           <p:cNvSpPr txBox="1"/>
           <p:nvPr/>
         </p:nvSpPr>
@@ -4529,7 +4573,7 @@
       </p:sp>
       <p:sp>
         <p:nvSpPr>
-          <p:cNvPr id="34" name="Rectangle 33"/>
+          <p:cNvPr id="35" name="Rectangle 34"/>
           <p:cNvSpPr/>
           <p:nvPr/>
         </p:nvSpPr>
@@ -4575,7 +4619,7 @@
       </p:sp>
       <p:sp>
         <p:nvSpPr>
-          <p:cNvPr id="35" name="TextBox 34"/>
+          <p:cNvPr id="36" name="TextBox 35"/>
           <p:cNvSpPr txBox="1"/>
           <p:nvPr/>
         </p:nvSpPr>
@@ -4615,7 +4659,7 @@
       </p:sp>
       <p:sp>
         <p:nvSpPr>
-          <p:cNvPr id="36" name="Rectangle 35"/>
+          <p:cNvPr id="37" name="Rectangle 36"/>
           <p:cNvSpPr/>
           <p:nvPr/>
         </p:nvSpPr>
@@ -4661,7 +4705,7 @@
       </p:sp>
       <p:sp>
         <p:nvSpPr>
-          <p:cNvPr id="37" name="TextBox 36"/>
+          <p:cNvPr id="38" name="TextBox 37"/>
           <p:cNvSpPr txBox="1"/>
           <p:nvPr/>
         </p:nvSpPr>
@@ -4701,7 +4745,7 @@
       </p:sp>
       <p:sp>
         <p:nvSpPr>
-          <p:cNvPr id="38" name="Rectangle 37"/>
+          <p:cNvPr id="39" name="Rectangle 38"/>
           <p:cNvSpPr/>
           <p:nvPr/>
         </p:nvSpPr>
@@ -4747,7 +4791,7 @@
       </p:sp>
       <p:sp>
         <p:nvSpPr>
-          <p:cNvPr id="39" name="TextBox 38"/>
+          <p:cNvPr id="40" name="TextBox 39"/>
           <p:cNvSpPr txBox="1"/>
           <p:nvPr/>
         </p:nvSpPr>
@@ -4787,7 +4831,7 @@
       </p:sp>
       <p:sp>
         <p:nvSpPr>
-          <p:cNvPr id="40" name="Rectangle 39"/>
+          <p:cNvPr id="41" name="Rectangle 40"/>
           <p:cNvSpPr/>
           <p:nvPr/>
         </p:nvSpPr>
@@ -4833,7 +4877,7 @@
       </p:sp>
       <p:sp>
         <p:nvSpPr>
-          <p:cNvPr id="41" name="TextBox 40"/>
+          <p:cNvPr id="42" name="TextBox 41"/>
           <p:cNvSpPr txBox="1"/>
           <p:nvPr/>
         </p:nvSpPr>
@@ -4873,7 +4917,7 @@
       </p:sp>
       <p:sp>
         <p:nvSpPr>
-          <p:cNvPr id="42" name="Rectangle 41"/>
+          <p:cNvPr id="43" name="Rectangle 42"/>
           <p:cNvSpPr/>
           <p:nvPr/>
         </p:nvSpPr>
@@ -4919,7 +4963,7 @@
       </p:sp>
       <p:sp>
         <p:nvSpPr>
-          <p:cNvPr id="43" name="TextBox 42"/>
+          <p:cNvPr id="44" name="TextBox 43"/>
           <p:cNvSpPr txBox="1"/>
           <p:nvPr/>
         </p:nvSpPr>
@@ -4976,7 +5020,7 @@
       </p:sp>
       <p:sp>
         <p:nvSpPr>
-          <p:cNvPr id="44" name="Rectangle 43"/>
+          <p:cNvPr id="45" name="Rectangle 44"/>
           <p:cNvSpPr/>
           <p:nvPr/>
         </p:nvSpPr>
@@ -5022,7 +5066,7 @@
       </p:sp>
       <p:sp>
         <p:nvSpPr>
-          <p:cNvPr id="45" name="TextBox 44"/>
+          <p:cNvPr id="46" name="TextBox 45"/>
           <p:cNvSpPr txBox="1"/>
           <p:nvPr/>
         </p:nvSpPr>
@@ -5062,7 +5106,7 @@
       </p:sp>
       <p:sp>
         <p:nvSpPr>
-          <p:cNvPr id="46" name="Rectangle 45"/>
+          <p:cNvPr id="47" name="Rectangle 46"/>
           <p:cNvSpPr/>
           <p:nvPr/>
         </p:nvSpPr>
@@ -5108,7 +5152,7 @@
       </p:sp>
       <p:sp>
         <p:nvSpPr>
-          <p:cNvPr id="47" name="TextBox 46"/>
+          <p:cNvPr id="48" name="TextBox 47"/>
           <p:cNvSpPr txBox="1"/>
           <p:nvPr/>
         </p:nvSpPr>
@@ -5148,7 +5192,7 @@
       </p:sp>
       <p:sp>
         <p:nvSpPr>
-          <p:cNvPr id="48" name="Rectangle 47"/>
+          <p:cNvPr id="49" name="Rectangle 48"/>
           <p:cNvSpPr/>
           <p:nvPr/>
         </p:nvSpPr>
@@ -5194,7 +5238,7 @@
       </p:sp>
       <p:sp>
         <p:nvSpPr>
-          <p:cNvPr id="49" name="TextBox 48"/>
+          <p:cNvPr id="50" name="TextBox 49"/>
           <p:cNvSpPr txBox="1"/>
           <p:nvPr/>
         </p:nvSpPr>
@@ -5234,7 +5278,7 @@
       </p:sp>
       <p:sp>
         <p:nvSpPr>
-          <p:cNvPr id="50" name="Rectangle 49"/>
+          <p:cNvPr id="51" name="Rectangle 50"/>
           <p:cNvSpPr/>
           <p:nvPr/>
         </p:nvSpPr>
@@ -5280,7 +5324,7 @@
       </p:sp>
       <p:sp>
         <p:nvSpPr>
-          <p:cNvPr id="51" name="TextBox 50"/>
+          <p:cNvPr id="52" name="TextBox 51"/>
           <p:cNvSpPr txBox="1"/>
           <p:nvPr/>
         </p:nvSpPr>
@@ -5320,7 +5364,7 @@
       </p:sp>
       <p:sp>
         <p:nvSpPr>
-          <p:cNvPr id="52" name="Rectangle 51"/>
+          <p:cNvPr id="53" name="Rectangle 52"/>
           <p:cNvSpPr/>
           <p:nvPr/>
         </p:nvSpPr>
@@ -5366,7 +5410,7 @@
       </p:sp>
       <p:sp>
         <p:nvSpPr>
-          <p:cNvPr id="53" name="TextBox 52"/>
+          <p:cNvPr id="54" name="TextBox 53"/>
           <p:cNvSpPr txBox="1"/>
           <p:nvPr/>
         </p:nvSpPr>
@@ -5406,7 +5450,7 @@
       </p:sp>
       <p:sp>
         <p:nvSpPr>
-          <p:cNvPr id="54" name="Rectangle 53"/>
+          <p:cNvPr id="55" name="Rectangle 54"/>
           <p:cNvSpPr/>
           <p:nvPr/>
         </p:nvSpPr>
@@ -5452,7 +5496,7 @@
       </p:sp>
       <p:sp>
         <p:nvSpPr>
-          <p:cNvPr id="55" name="TextBox 54"/>
+          <p:cNvPr id="56" name="TextBox 55"/>
           <p:cNvSpPr txBox="1"/>
           <p:nvPr/>
         </p:nvSpPr>
@@ -5492,7 +5536,7 @@
       </p:sp>
       <p:sp>
         <p:nvSpPr>
-          <p:cNvPr id="56" name="Rectangle 55"/>
+          <p:cNvPr id="57" name="Rectangle 56"/>
           <p:cNvSpPr/>
           <p:nvPr/>
         </p:nvSpPr>
@@ -5538,7 +5582,7 @@
       </p:sp>
       <p:sp>
         <p:nvSpPr>
-          <p:cNvPr id="57" name="TextBox 56"/>
+          <p:cNvPr id="58" name="TextBox 57"/>
           <p:cNvSpPr txBox="1"/>
           <p:nvPr/>
         </p:nvSpPr>
@@ -5578,7 +5622,7 @@
       </p:sp>
       <p:sp>
         <p:nvSpPr>
-          <p:cNvPr id="58" name="Rectangle 57"/>
+          <p:cNvPr id="59" name="Rectangle 58"/>
           <p:cNvSpPr/>
           <p:nvPr/>
         </p:nvSpPr>
@@ -5624,7 +5668,7 @@
       </p:sp>
       <p:sp>
         <p:nvSpPr>
-          <p:cNvPr id="59" name="TextBox 58"/>
+          <p:cNvPr id="60" name="TextBox 59"/>
           <p:cNvSpPr txBox="1"/>
           <p:nvPr/>
         </p:nvSpPr>
@@ -5681,7 +5725,7 @@
       </p:sp>
       <p:sp>
         <p:nvSpPr>
-          <p:cNvPr id="60" name="Rectangle 59"/>
+          <p:cNvPr id="61" name="Rectangle 60"/>
           <p:cNvSpPr/>
           <p:nvPr/>
         </p:nvSpPr>
@@ -5727,7 +5771,7 @@
       </p:sp>
       <p:sp>
         <p:nvSpPr>
-          <p:cNvPr id="61" name="TextBox 60"/>
+          <p:cNvPr id="62" name="TextBox 61"/>
           <p:cNvSpPr txBox="1"/>
           <p:nvPr/>
         </p:nvSpPr>
@@ -5767,7 +5811,7 @@
       </p:sp>
       <p:sp>
         <p:nvSpPr>
-          <p:cNvPr id="62" name="Rectangle 61"/>
+          <p:cNvPr id="63" name="Rectangle 62"/>
           <p:cNvSpPr/>
           <p:nvPr/>
         </p:nvSpPr>
@@ -5813,7 +5857,7 @@
       </p:sp>
       <p:sp>
         <p:nvSpPr>
-          <p:cNvPr id="63" name="TextBox 62"/>
+          <p:cNvPr id="64" name="TextBox 63"/>
           <p:cNvSpPr txBox="1"/>
           <p:nvPr/>
         </p:nvSpPr>
@@ -5853,7 +5897,7 @@
       </p:sp>
       <p:sp>
         <p:nvSpPr>
-          <p:cNvPr id="64" name="Rectangle 63"/>
+          <p:cNvPr id="65" name="Rectangle 64"/>
           <p:cNvSpPr/>
           <p:nvPr/>
         </p:nvSpPr>
@@ -5899,7 +5943,7 @@
       </p:sp>
       <p:sp>
         <p:nvSpPr>
-          <p:cNvPr id="65" name="TextBox 64"/>
+          <p:cNvPr id="66" name="TextBox 65"/>
           <p:cNvSpPr txBox="1"/>
           <p:nvPr/>
         </p:nvSpPr>
@@ -5939,7 +5983,7 @@
       </p:sp>
       <p:sp>
         <p:nvSpPr>
-          <p:cNvPr id="66" name="Rectangle 65"/>
+          <p:cNvPr id="67" name="Rectangle 66"/>
           <p:cNvSpPr/>
           <p:nvPr/>
         </p:nvSpPr>
@@ -5985,7 +6029,7 @@
       </p:sp>
       <p:sp>
         <p:nvSpPr>
-          <p:cNvPr id="67" name="TextBox 66"/>
+          <p:cNvPr id="68" name="TextBox 67"/>
           <p:cNvSpPr txBox="1"/>
           <p:nvPr/>
         </p:nvSpPr>
@@ -6025,7 +6069,7 @@
       </p:sp>
       <p:sp>
         <p:nvSpPr>
-          <p:cNvPr id="68" name="Rectangle 67"/>
+          <p:cNvPr id="69" name="Rectangle 68"/>
           <p:cNvSpPr/>
           <p:nvPr/>
         </p:nvSpPr>
@@ -6071,7 +6115,7 @@
       </p:sp>
       <p:sp>
         <p:nvSpPr>
-          <p:cNvPr id="69" name="TextBox 68"/>
+          <p:cNvPr id="70" name="TextBox 69"/>
           <p:cNvSpPr txBox="1"/>
           <p:nvPr/>
         </p:nvSpPr>
@@ -6111,7 +6155,7 @@
       </p:sp>
       <p:sp>
         <p:nvSpPr>
-          <p:cNvPr id="70" name="Rectangle 69"/>
+          <p:cNvPr id="71" name="Rectangle 70"/>
           <p:cNvSpPr/>
           <p:nvPr/>
         </p:nvSpPr>
@@ -6157,7 +6201,7 @@
       </p:sp>
       <p:sp>
         <p:nvSpPr>
-          <p:cNvPr id="71" name="TextBox 70"/>
+          <p:cNvPr id="72" name="TextBox 71"/>
           <p:cNvSpPr txBox="1"/>
           <p:nvPr/>
         </p:nvSpPr>
@@ -6197,7 +6241,7 @@
       </p:sp>
       <p:sp>
         <p:nvSpPr>
-          <p:cNvPr id="72" name="Rectangle 71"/>
+          <p:cNvPr id="73" name="Rectangle 72"/>
           <p:cNvSpPr/>
           <p:nvPr/>
         </p:nvSpPr>
@@ -6243,7 +6287,7 @@
       </p:sp>
       <p:sp>
         <p:nvSpPr>
-          <p:cNvPr id="73" name="TextBox 72"/>
+          <p:cNvPr id="74" name="TextBox 73"/>
           <p:cNvSpPr txBox="1"/>
           <p:nvPr/>
         </p:nvSpPr>
@@ -6283,7 +6327,7 @@
       </p:sp>
       <p:sp>
         <p:nvSpPr>
-          <p:cNvPr id="74" name="Rectangle 73"/>
+          <p:cNvPr id="75" name="Rectangle 74"/>
           <p:cNvSpPr/>
           <p:nvPr/>
         </p:nvSpPr>
@@ -6329,7 +6373,7 @@
       </p:sp>
       <p:sp>
         <p:nvSpPr>
-          <p:cNvPr id="75" name="TextBox 74"/>
+          <p:cNvPr id="76" name="TextBox 75"/>
           <p:cNvSpPr txBox="1"/>
           <p:nvPr/>
         </p:nvSpPr>
@@ -6386,7 +6430,7 @@
       </p:sp>
       <p:sp>
         <p:nvSpPr>
-          <p:cNvPr id="76" name="Rectangle 75"/>
+          <p:cNvPr id="77" name="Rectangle 76"/>
           <p:cNvSpPr/>
           <p:nvPr/>
         </p:nvSpPr>
@@ -6432,7 +6476,7 @@
       </p:sp>
       <p:sp>
         <p:nvSpPr>
-          <p:cNvPr id="77" name="TextBox 76"/>
+          <p:cNvPr id="78" name="TextBox 77"/>
           <p:cNvSpPr txBox="1"/>
           <p:nvPr/>
         </p:nvSpPr>
@@ -6472,7 +6516,7 @@
       </p:sp>
       <p:sp>
         <p:nvSpPr>
-          <p:cNvPr id="78" name="Rectangle 77"/>
+          <p:cNvPr id="79" name="Rectangle 78"/>
           <p:cNvSpPr/>
           <p:nvPr/>
         </p:nvSpPr>
@@ -6518,7 +6562,7 @@
       </p:sp>
       <p:sp>
         <p:nvSpPr>
-          <p:cNvPr id="79" name="TextBox 78"/>
+          <p:cNvPr id="80" name="TextBox 79"/>
           <p:cNvSpPr txBox="1"/>
           <p:nvPr/>
         </p:nvSpPr>
@@ -6558,7 +6602,7 @@
       </p:sp>
       <p:sp>
         <p:nvSpPr>
-          <p:cNvPr id="80" name="Rectangle 79"/>
+          <p:cNvPr id="81" name="Rectangle 80"/>
           <p:cNvSpPr/>
           <p:nvPr/>
         </p:nvSpPr>
@@ -6604,7 +6648,7 @@
       </p:sp>
       <p:sp>
         <p:nvSpPr>
-          <p:cNvPr id="81" name="TextBox 80"/>
+          <p:cNvPr id="82" name="TextBox 81"/>
           <p:cNvSpPr txBox="1"/>
           <p:nvPr/>
         </p:nvSpPr>
@@ -6644,7 +6688,7 @@
       </p:sp>
       <p:sp>
         <p:nvSpPr>
-          <p:cNvPr id="82" name="Rectangle 81"/>
+          <p:cNvPr id="83" name="Rectangle 82"/>
           <p:cNvSpPr/>
           <p:nvPr/>
         </p:nvSpPr>
@@ -6690,7 +6734,7 @@
       </p:sp>
       <p:sp>
         <p:nvSpPr>
-          <p:cNvPr id="83" name="TextBox 82"/>
+          <p:cNvPr id="84" name="TextBox 83"/>
           <p:cNvSpPr txBox="1"/>
           <p:nvPr/>
         </p:nvSpPr>
@@ -6730,7 +6774,7 @@
       </p:sp>
       <p:sp>
         <p:nvSpPr>
-          <p:cNvPr id="84" name="Rectangle 83"/>
+          <p:cNvPr id="85" name="Rectangle 84"/>
           <p:cNvSpPr/>
           <p:nvPr/>
         </p:nvSpPr>
@@ -6776,7 +6820,7 @@
       </p:sp>
       <p:sp>
         <p:nvSpPr>
-          <p:cNvPr id="85" name="TextBox 84"/>
+          <p:cNvPr id="86" name="TextBox 85"/>
           <p:cNvSpPr txBox="1"/>
           <p:nvPr/>
         </p:nvSpPr>
@@ -6816,7 +6860,7 @@
       </p:sp>
       <p:sp>
         <p:nvSpPr>
-          <p:cNvPr id="86" name="Rectangle 85"/>
+          <p:cNvPr id="87" name="Rectangle 86"/>
           <p:cNvSpPr/>
           <p:nvPr/>
         </p:nvSpPr>
@@ -6862,7 +6906,7 @@
       </p:sp>
       <p:sp>
         <p:nvSpPr>
-          <p:cNvPr id="87" name="TextBox 86"/>
+          <p:cNvPr id="88" name="TextBox 87"/>
           <p:cNvSpPr txBox="1"/>
           <p:nvPr/>
         </p:nvSpPr>
@@ -6902,7 +6946,7 @@
       </p:sp>
       <p:sp>
         <p:nvSpPr>
-          <p:cNvPr id="88" name="Rectangle 87"/>
+          <p:cNvPr id="89" name="Rectangle 88"/>
           <p:cNvSpPr/>
           <p:nvPr/>
         </p:nvSpPr>
@@ -6948,7 +6992,7 @@
       </p:sp>
       <p:sp>
         <p:nvSpPr>
-          <p:cNvPr id="89" name="TextBox 88"/>
+          <p:cNvPr id="90" name="TextBox 89"/>
           <p:cNvSpPr txBox="1"/>
           <p:nvPr/>
         </p:nvSpPr>
@@ -6988,7 +7032,7 @@
       </p:sp>
       <p:sp>
         <p:nvSpPr>
-          <p:cNvPr id="90" name="Rectangle 89"/>
+          <p:cNvPr id="91" name="Rectangle 90"/>
           <p:cNvSpPr/>
           <p:nvPr/>
         </p:nvSpPr>
@@ -7034,7 +7078,7 @@
       </p:sp>
       <p:sp>
         <p:nvSpPr>
-          <p:cNvPr id="91" name="TextBox 90"/>
+          <p:cNvPr id="92" name="TextBox 91"/>
           <p:cNvSpPr txBox="1"/>
           <p:nvPr/>
         </p:nvSpPr>
@@ -7091,7 +7135,7 @@
       </p:sp>
       <p:sp>
         <p:nvSpPr>
-          <p:cNvPr id="92" name="Rectangle 91"/>
+          <p:cNvPr id="93" name="Rectangle 92"/>
           <p:cNvSpPr/>
           <p:nvPr/>
         </p:nvSpPr>
@@ -7137,7 +7181,7 @@
       </p:sp>
       <p:sp>
         <p:nvSpPr>
-          <p:cNvPr id="93" name="TextBox 92"/>
+          <p:cNvPr id="94" name="TextBox 93"/>
           <p:cNvSpPr txBox="1"/>
           <p:nvPr/>
         </p:nvSpPr>
@@ -7177,7 +7221,7 @@
       </p:sp>
       <p:sp>
         <p:nvSpPr>
-          <p:cNvPr id="94" name="Rectangle 93"/>
+          <p:cNvPr id="95" name="Rectangle 94"/>
           <p:cNvSpPr/>
           <p:nvPr/>
         </p:nvSpPr>
@@ -7223,7 +7267,7 @@
       </p:sp>
       <p:sp>
         <p:nvSpPr>
-          <p:cNvPr id="95" name="TextBox 94"/>
+          <p:cNvPr id="96" name="TextBox 95"/>
           <p:cNvSpPr txBox="1"/>
           <p:nvPr/>
         </p:nvSpPr>
@@ -7263,7 +7307,7 @@
       </p:sp>
       <p:sp>
         <p:nvSpPr>
-          <p:cNvPr id="96" name="Rectangle 95"/>
+          <p:cNvPr id="97" name="Rectangle 96"/>
           <p:cNvSpPr/>
           <p:nvPr/>
         </p:nvSpPr>
@@ -7309,7 +7353,7 @@
       </p:sp>
       <p:sp>
         <p:nvSpPr>
-          <p:cNvPr id="97" name="TextBox 96"/>
+          <p:cNvPr id="98" name="TextBox 97"/>
           <p:cNvSpPr txBox="1"/>
           <p:nvPr/>
         </p:nvSpPr>
@@ -7349,7 +7393,7 @@
       </p:sp>
       <p:sp>
         <p:nvSpPr>
-          <p:cNvPr id="98" name="Rectangle 97"/>
+          <p:cNvPr id="99" name="Rectangle 98"/>
           <p:cNvSpPr/>
           <p:nvPr/>
         </p:nvSpPr>
@@ -7395,7 +7439,7 @@
       </p:sp>
       <p:sp>
         <p:nvSpPr>
-          <p:cNvPr id="99" name="TextBox 98"/>
+          <p:cNvPr id="100" name="TextBox 99"/>
           <p:cNvSpPr txBox="1"/>
           <p:nvPr/>
         </p:nvSpPr>
@@ -7435,7 +7479,7 @@
       </p:sp>
       <p:sp>
         <p:nvSpPr>
-          <p:cNvPr id="100" name="Rectangle 99"/>
+          <p:cNvPr id="101" name="Rectangle 100"/>
           <p:cNvSpPr/>
           <p:nvPr/>
         </p:nvSpPr>
@@ -7481,7 +7525,7 @@
       </p:sp>
       <p:sp>
         <p:nvSpPr>
-          <p:cNvPr id="101" name="TextBox 100"/>
+          <p:cNvPr id="102" name="TextBox 101"/>
           <p:cNvSpPr txBox="1"/>
           <p:nvPr/>
         </p:nvSpPr>
@@ -7521,7 +7565,7 @@
       </p:sp>
       <p:sp>
         <p:nvSpPr>
-          <p:cNvPr id="102" name="Rectangle 101"/>
+          <p:cNvPr id="103" name="Rectangle 102"/>
           <p:cNvSpPr/>
           <p:nvPr/>
         </p:nvSpPr>
@@ -7567,7 +7611,7 @@
       </p:sp>
       <p:sp>
         <p:nvSpPr>
-          <p:cNvPr id="103" name="TextBox 102"/>
+          <p:cNvPr id="104" name="TextBox 103"/>
           <p:cNvSpPr txBox="1"/>
           <p:nvPr/>
         </p:nvSpPr>
@@ -7607,7 +7651,7 @@
       </p:sp>
       <p:sp>
         <p:nvSpPr>
-          <p:cNvPr id="104" name="Rectangle 103"/>
+          <p:cNvPr id="105" name="Rectangle 104"/>
           <p:cNvSpPr/>
           <p:nvPr/>
         </p:nvSpPr>
@@ -7653,7 +7697,7 @@
       </p:sp>
       <p:sp>
         <p:nvSpPr>
-          <p:cNvPr id="105" name="TextBox 104"/>
+          <p:cNvPr id="106" name="TextBox 105"/>
           <p:cNvSpPr txBox="1"/>
           <p:nvPr/>
         </p:nvSpPr>
@@ -7693,7 +7737,7 @@
       </p:sp>
       <p:sp>
         <p:nvSpPr>
-          <p:cNvPr id="106" name="Rectangle 105"/>
+          <p:cNvPr id="107" name="Rectangle 106"/>
           <p:cNvSpPr/>
           <p:nvPr/>
         </p:nvSpPr>
@@ -7739,7 +7783,7 @@
       </p:sp>
       <p:sp>
         <p:nvSpPr>
-          <p:cNvPr id="107" name="TextBox 106"/>
+          <p:cNvPr id="108" name="TextBox 107"/>
           <p:cNvSpPr txBox="1"/>
           <p:nvPr/>
         </p:nvSpPr>
@@ -7796,7 +7840,7 @@
       </p:sp>
       <p:sp>
         <p:nvSpPr>
-          <p:cNvPr id="108" name="Rectangle 107"/>
+          <p:cNvPr id="109" name="Rectangle 108"/>
           <p:cNvSpPr/>
           <p:nvPr/>
         </p:nvSpPr>
@@ -7842,7 +7886,7 @@
       </p:sp>
       <p:sp>
         <p:nvSpPr>
-          <p:cNvPr id="109" name="TextBox 108"/>
+          <p:cNvPr id="110" name="TextBox 109"/>
           <p:cNvSpPr txBox="1"/>
           <p:nvPr/>
         </p:nvSpPr>
@@ -7882,7 +7926,7 @@
       </p:sp>
       <p:sp>
         <p:nvSpPr>
-          <p:cNvPr id="110" name="Rectangle 109"/>
+          <p:cNvPr id="111" name="Rectangle 110"/>
           <p:cNvSpPr/>
           <p:nvPr/>
         </p:nvSpPr>
@@ -7928,7 +7972,7 @@
       </p:sp>
       <p:sp>
         <p:nvSpPr>
-          <p:cNvPr id="111" name="TextBox 110"/>
+          <p:cNvPr id="112" name="TextBox 111"/>
           <p:cNvSpPr txBox="1"/>
           <p:nvPr/>
         </p:nvSpPr>
@@ -7968,7 +8012,7 @@
       </p:sp>
       <p:sp>
         <p:nvSpPr>
-          <p:cNvPr id="112" name="Rectangle 111"/>
+          <p:cNvPr id="113" name="Rectangle 112"/>
           <p:cNvSpPr/>
           <p:nvPr/>
         </p:nvSpPr>
@@ -8014,7 +8058,7 @@
       </p:sp>
       <p:sp>
         <p:nvSpPr>
-          <p:cNvPr id="113" name="TextBox 112"/>
+          <p:cNvPr id="114" name="TextBox 113"/>
           <p:cNvSpPr txBox="1"/>
           <p:nvPr/>
         </p:nvSpPr>
@@ -8054,7 +8098,7 @@
       </p:sp>
       <p:sp>
         <p:nvSpPr>
-          <p:cNvPr id="114" name="Rectangle 113"/>
+          <p:cNvPr id="115" name="Rectangle 114"/>
           <p:cNvSpPr/>
           <p:nvPr/>
         </p:nvSpPr>
@@ -8100,7 +8144,7 @@
       </p:sp>
       <p:sp>
         <p:nvSpPr>
-          <p:cNvPr id="115" name="TextBox 114"/>
+          <p:cNvPr id="116" name="TextBox 115"/>
           <p:cNvSpPr txBox="1"/>
           <p:nvPr/>
         </p:nvSpPr>
@@ -8140,7 +8184,7 @@
       </p:sp>
       <p:sp>
         <p:nvSpPr>
-          <p:cNvPr id="116" name="Rectangle 115"/>
+          <p:cNvPr id="117" name="Rectangle 116"/>
           <p:cNvSpPr/>
           <p:nvPr/>
         </p:nvSpPr>
@@ -8186,7 +8230,7 @@
       </p:sp>
       <p:sp>
         <p:nvSpPr>
-          <p:cNvPr id="117" name="TextBox 116"/>
+          <p:cNvPr id="118" name="TextBox 117"/>
           <p:cNvSpPr txBox="1"/>
           <p:nvPr/>
         </p:nvSpPr>
@@ -8226,7 +8270,7 @@
       </p:sp>
       <p:sp>
         <p:nvSpPr>
-          <p:cNvPr id="118" name="Rectangle 117"/>
+          <p:cNvPr id="119" name="Rectangle 118"/>
           <p:cNvSpPr/>
           <p:nvPr/>
         </p:nvSpPr>
@@ -8272,7 +8316,7 @@
       </p:sp>
       <p:sp>
         <p:nvSpPr>
-          <p:cNvPr id="119" name="TextBox 118"/>
+          <p:cNvPr id="120" name="TextBox 119"/>
           <p:cNvSpPr txBox="1"/>
           <p:nvPr/>
         </p:nvSpPr>
@@ -8312,7 +8356,7 @@
       </p:sp>
       <p:sp>
         <p:nvSpPr>
-          <p:cNvPr id="120" name="Rectangle 119"/>
+          <p:cNvPr id="121" name="Rectangle 120"/>
           <p:cNvSpPr/>
           <p:nvPr/>
         </p:nvSpPr>
@@ -8358,7 +8402,7 @@
       </p:sp>
       <p:sp>
         <p:nvSpPr>
-          <p:cNvPr id="121" name="TextBox 120"/>
+          <p:cNvPr id="122" name="TextBox 121"/>
           <p:cNvSpPr txBox="1"/>
           <p:nvPr/>
         </p:nvSpPr>
@@ -8398,7 +8442,7 @@
       </p:sp>
       <p:sp>
         <p:nvSpPr>
-          <p:cNvPr id="122" name="Rectangle 121"/>
+          <p:cNvPr id="123" name="Rectangle 122"/>
           <p:cNvSpPr/>
           <p:nvPr/>
         </p:nvSpPr>
@@ -8444,7 +8488,7 @@
       </p:sp>
       <p:sp>
         <p:nvSpPr>
-          <p:cNvPr id="123" name="TextBox 122"/>
+          <p:cNvPr id="124" name="TextBox 123"/>
           <p:cNvSpPr txBox="1"/>
           <p:nvPr/>
         </p:nvSpPr>
@@ -8501,7 +8545,7 @@
       </p:sp>
       <p:sp>
         <p:nvSpPr>
-          <p:cNvPr id="124" name="Rectangle 123"/>
+          <p:cNvPr id="125" name="Rectangle 124"/>
           <p:cNvSpPr/>
           <p:nvPr/>
         </p:nvSpPr>
@@ -8547,7 +8591,7 @@
       </p:sp>
       <p:sp>
         <p:nvSpPr>
-          <p:cNvPr id="125" name="TextBox 124"/>
+          <p:cNvPr id="126" name="TextBox 125"/>
           <p:cNvSpPr txBox="1"/>
           <p:nvPr/>
         </p:nvSpPr>
@@ -8587,7 +8631,7 @@
       </p:sp>
       <p:sp>
         <p:nvSpPr>
-          <p:cNvPr id="126" name="Rectangle 125"/>
+          <p:cNvPr id="127" name="Rectangle 126"/>
           <p:cNvSpPr/>
           <p:nvPr/>
         </p:nvSpPr>
@@ -8633,7 +8677,7 @@
       </p:sp>
       <p:sp>
         <p:nvSpPr>
-          <p:cNvPr id="127" name="TextBox 126"/>
+          <p:cNvPr id="128" name="TextBox 127"/>
           <p:cNvSpPr txBox="1"/>
           <p:nvPr/>
         </p:nvSpPr>
@@ -8673,7 +8717,7 @@
       </p:sp>
       <p:sp>
         <p:nvSpPr>
-          <p:cNvPr id="128" name="Rectangle 127"/>
+          <p:cNvPr id="129" name="Rectangle 128"/>
           <p:cNvSpPr/>
           <p:nvPr/>
         </p:nvSpPr>
@@ -8719,7 +8763,7 @@
       </p:sp>
       <p:sp>
         <p:nvSpPr>
-          <p:cNvPr id="129" name="TextBox 128"/>
+          <p:cNvPr id="130" name="TextBox 129"/>
           <p:cNvSpPr txBox="1"/>
           <p:nvPr/>
         </p:nvSpPr>
@@ -8759,7 +8803,7 @@
       </p:sp>
       <p:sp>
         <p:nvSpPr>
-          <p:cNvPr id="130" name="Rectangle 129"/>
+          <p:cNvPr id="131" name="Rectangle 130"/>
           <p:cNvSpPr/>
           <p:nvPr/>
         </p:nvSpPr>
@@ -8805,7 +8849,7 @@
       </p:sp>
       <p:sp>
         <p:nvSpPr>
-          <p:cNvPr id="131" name="TextBox 130"/>
+          <p:cNvPr id="132" name="TextBox 131"/>
           <p:cNvSpPr txBox="1"/>
           <p:nvPr/>
         </p:nvSpPr>
@@ -8845,7 +8889,7 @@
       </p:sp>
       <p:sp>
         <p:nvSpPr>
-          <p:cNvPr id="132" name="Rectangle 131"/>
+          <p:cNvPr id="133" name="Rectangle 132"/>
           <p:cNvSpPr/>
           <p:nvPr/>
         </p:nvSpPr>
@@ -8891,7 +8935,7 @@
       </p:sp>
       <p:sp>
         <p:nvSpPr>
-          <p:cNvPr id="133" name="TextBox 132"/>
+          <p:cNvPr id="134" name="TextBox 133"/>
           <p:cNvSpPr txBox="1"/>
           <p:nvPr/>
         </p:nvSpPr>
@@ -8931,7 +8975,7 @@
       </p:sp>
       <p:sp>
         <p:nvSpPr>
-          <p:cNvPr id="134" name="Rectangle 133"/>
+          <p:cNvPr id="135" name="Rectangle 134"/>
           <p:cNvSpPr/>
           <p:nvPr/>
         </p:nvSpPr>
@@ -8977,7 +9021,7 @@
       </p:sp>
       <p:sp>
         <p:nvSpPr>
-          <p:cNvPr id="135" name="TextBox 134"/>
+          <p:cNvPr id="136" name="TextBox 135"/>
           <p:cNvSpPr txBox="1"/>
           <p:nvPr/>
         </p:nvSpPr>
@@ -9017,7 +9061,7 @@
       </p:sp>
       <p:sp>
         <p:nvSpPr>
-          <p:cNvPr id="136" name="Rectangle 135"/>
+          <p:cNvPr id="137" name="Rectangle 136"/>
           <p:cNvSpPr/>
           <p:nvPr/>
         </p:nvSpPr>
@@ -9063,7 +9107,7 @@
       </p:sp>
       <p:sp>
         <p:nvSpPr>
-          <p:cNvPr id="137" name="TextBox 136"/>
+          <p:cNvPr id="138" name="TextBox 137"/>
           <p:cNvSpPr txBox="1"/>
           <p:nvPr/>
         </p:nvSpPr>
@@ -9103,7 +9147,7 @@
       </p:sp>
       <p:sp>
         <p:nvSpPr>
-          <p:cNvPr id="138" name="Rectangle 137"/>
+          <p:cNvPr id="139" name="Rectangle 138"/>
           <p:cNvSpPr/>
           <p:nvPr/>
         </p:nvSpPr>
@@ -9147,7 +9191,7 @@
       </p:sp>
       <p:sp>
         <p:nvSpPr>
-          <p:cNvPr id="139" name="TextBox 138"/>
+          <p:cNvPr id="140" name="TextBox 139"/>
           <p:cNvSpPr txBox="1"/>
           <p:nvPr/>
         </p:nvSpPr>
@@ -9187,7 +9231,7 @@
       </p:sp>
       <p:sp>
         <p:nvSpPr>
-          <p:cNvPr id="140" name="Rectangle 139"/>
+          <p:cNvPr id="141" name="Rectangle 140"/>
           <p:cNvSpPr/>
           <p:nvPr/>
         </p:nvSpPr>
@@ -9231,7 +9275,7 @@
       </p:sp>
       <p:sp>
         <p:nvSpPr>
-          <p:cNvPr id="141" name="TextBox 140"/>
+          <p:cNvPr id="142" name="TextBox 141"/>
           <p:cNvSpPr txBox="1"/>
           <p:nvPr/>
         </p:nvSpPr>
@@ -9271,7 +9315,7 @@
       </p:sp>
       <p:sp>
         <p:nvSpPr>
-          <p:cNvPr id="142" name="Rectangle 141"/>
+          <p:cNvPr id="143" name="Rectangle 142"/>
           <p:cNvSpPr/>
           <p:nvPr/>
         </p:nvSpPr>
@@ -9315,7 +9359,7 @@
       </p:sp>
       <p:sp>
         <p:nvSpPr>
-          <p:cNvPr id="143" name="TextBox 142"/>
+          <p:cNvPr id="144" name="TextBox 143"/>
           <p:cNvSpPr txBox="1"/>
           <p:nvPr/>
         </p:nvSpPr>
@@ -9355,7 +9399,7 @@
       </p:sp>
       <p:sp>
         <p:nvSpPr>
-          <p:cNvPr id="144" name="Rectangle 143"/>
+          <p:cNvPr id="145" name="Rectangle 144"/>
           <p:cNvSpPr/>
           <p:nvPr/>
         </p:nvSpPr>
@@ -9399,7 +9443,7 @@
       </p:sp>
       <p:sp>
         <p:nvSpPr>
-          <p:cNvPr id="145" name="TextBox 144"/>
+          <p:cNvPr id="146" name="TextBox 145"/>
           <p:cNvSpPr txBox="1"/>
           <p:nvPr/>
         </p:nvSpPr>
@@ -9439,7 +9483,7 @@
       </p:sp>
       <p:sp>
         <p:nvSpPr>
-          <p:cNvPr id="146" name="Rectangle 145"/>
+          <p:cNvPr id="147" name="Rectangle 146"/>
           <p:cNvSpPr/>
           <p:nvPr/>
         </p:nvSpPr>
@@ -9483,7 +9527,7 @@
       </p:sp>
       <p:sp>
         <p:nvSpPr>
-          <p:cNvPr id="147" name="TextBox 146"/>
+          <p:cNvPr id="148" name="TextBox 147"/>
           <p:cNvSpPr txBox="1"/>
           <p:nvPr/>
         </p:nvSpPr>
@@ -9523,7 +9567,7 @@
       </p:sp>
       <p:sp>
         <p:nvSpPr>
-          <p:cNvPr id="148" name="Rectangle 147"/>
+          <p:cNvPr id="149" name="Rectangle 148"/>
           <p:cNvSpPr/>
           <p:nvPr/>
         </p:nvSpPr>
@@ -9567,7 +9611,7 @@
       </p:sp>
       <p:sp>
         <p:nvSpPr>
-          <p:cNvPr id="149" name="TextBox 148"/>
+          <p:cNvPr id="150" name="TextBox 149"/>
           <p:cNvSpPr txBox="1"/>
           <p:nvPr/>
         </p:nvSpPr>
@@ -9607,7 +9651,7 @@
       </p:sp>
       <p:sp>
         <p:nvSpPr>
-          <p:cNvPr id="150" name="Rectangle 149"/>
+          <p:cNvPr id="151" name="Rectangle 150"/>
           <p:cNvSpPr/>
           <p:nvPr/>
         </p:nvSpPr>
@@ -9651,7 +9695,7 @@
       </p:sp>
       <p:sp>
         <p:nvSpPr>
-          <p:cNvPr id="151" name="TextBox 150"/>
+          <p:cNvPr id="152" name="TextBox 151"/>
           <p:cNvSpPr txBox="1"/>
           <p:nvPr/>
         </p:nvSpPr>
@@ -9691,7 +9735,7 @@
       </p:sp>
       <p:sp>
         <p:nvSpPr>
-          <p:cNvPr id="152" name="Rectangle 151"/>
+          <p:cNvPr id="153" name="Rectangle 152"/>
           <p:cNvSpPr/>
           <p:nvPr/>
         </p:nvSpPr>
@@ -9735,7 +9779,7 @@
       </p:sp>
       <p:sp>
         <p:nvSpPr>
-          <p:cNvPr id="153" name="TextBox 152"/>
+          <p:cNvPr id="154" name="TextBox 153"/>
           <p:cNvSpPr txBox="1"/>
           <p:nvPr/>
         </p:nvSpPr>
@@ -9775,7 +9819,7 @@
       </p:sp>
       <p:sp>
         <p:nvSpPr>
-          <p:cNvPr id="154" name="Rectangle 153"/>
+          <p:cNvPr id="155" name="Rectangle 154"/>
           <p:cNvSpPr/>
           <p:nvPr/>
         </p:nvSpPr>
@@ -9821,7 +9865,7 @@
       </p:sp>
       <p:sp>
         <p:nvSpPr>
-          <p:cNvPr id="155" name="TextBox 154"/>
+          <p:cNvPr id="156" name="TextBox 155"/>
           <p:cNvSpPr txBox="1"/>
           <p:nvPr/>
         </p:nvSpPr>
@@ -9861,7 +9905,7 @@
       </p:sp>
       <p:sp>
         <p:nvSpPr>
-          <p:cNvPr id="156" name="Rectangle 155"/>
+          <p:cNvPr id="157" name="Rectangle 156"/>
           <p:cNvSpPr/>
           <p:nvPr/>
         </p:nvSpPr>
@@ -9907,7 +9951,7 @@
       </p:sp>
       <p:sp>
         <p:nvSpPr>
-          <p:cNvPr id="157" name="TextBox 156"/>
+          <p:cNvPr id="158" name="TextBox 157"/>
           <p:cNvSpPr txBox="1"/>
           <p:nvPr/>
         </p:nvSpPr>
@@ -9964,7 +10008,7 @@
       </p:sp>
       <p:sp>
         <p:nvSpPr>
-          <p:cNvPr id="158" name="Rectangle 157"/>
+          <p:cNvPr id="159" name="Rectangle 158"/>
           <p:cNvSpPr/>
           <p:nvPr/>
         </p:nvSpPr>
@@ -10010,7 +10054,7 @@
       </p:sp>
       <p:sp>
         <p:nvSpPr>
-          <p:cNvPr id="159" name="TextBox 158"/>
+          <p:cNvPr id="160" name="TextBox 159"/>
           <p:cNvSpPr txBox="1"/>
           <p:nvPr/>
         </p:nvSpPr>
@@ -10050,7 +10094,7 @@
       </p:sp>
       <p:sp>
         <p:nvSpPr>
-          <p:cNvPr id="160" name="Rectangle 159"/>
+          <p:cNvPr id="161" name="Rectangle 160"/>
           <p:cNvSpPr/>
           <p:nvPr/>
         </p:nvSpPr>
@@ -10096,7 +10140,7 @@
       </p:sp>
       <p:sp>
         <p:nvSpPr>
-          <p:cNvPr id="161" name="TextBox 160"/>
+          <p:cNvPr id="162" name="TextBox 161"/>
           <p:cNvSpPr txBox="1"/>
           <p:nvPr/>
         </p:nvSpPr>
@@ -10136,7 +10180,7 @@
       </p:sp>
       <p:sp>
         <p:nvSpPr>
-          <p:cNvPr id="162" name="Rectangle 161"/>
+          <p:cNvPr id="163" name="Rectangle 162"/>
           <p:cNvSpPr/>
           <p:nvPr/>
         </p:nvSpPr>
@@ -10182,7 +10226,7 @@
       </p:sp>
       <p:sp>
         <p:nvSpPr>
-          <p:cNvPr id="163" name="TextBox 162"/>
+          <p:cNvPr id="164" name="TextBox 163"/>
           <p:cNvSpPr txBox="1"/>
           <p:nvPr/>
         </p:nvSpPr>
@@ -10222,7 +10266,7 @@
       </p:sp>
       <p:sp>
         <p:nvSpPr>
-          <p:cNvPr id="164" name="Rectangle 163"/>
+          <p:cNvPr id="165" name="Rectangle 164"/>
           <p:cNvSpPr/>
           <p:nvPr/>
         </p:nvSpPr>
@@ -10268,7 +10312,7 @@
       </p:sp>
       <p:sp>
         <p:nvSpPr>
-          <p:cNvPr id="165" name="TextBox 164"/>
+          <p:cNvPr id="166" name="TextBox 165"/>
           <p:cNvSpPr txBox="1"/>
           <p:nvPr/>
         </p:nvSpPr>
@@ -10308,7 +10352,7 @@
       </p:sp>
       <p:sp>
         <p:nvSpPr>
-          <p:cNvPr id="166" name="Rectangle 165"/>
+          <p:cNvPr id="167" name="Rectangle 166"/>
           <p:cNvSpPr/>
           <p:nvPr/>
         </p:nvSpPr>
@@ -10354,7 +10398,7 @@
       </p:sp>
       <p:sp>
         <p:nvSpPr>
-          <p:cNvPr id="167" name="TextBox 166"/>
+          <p:cNvPr id="168" name="TextBox 167"/>
           <p:cNvSpPr txBox="1"/>
           <p:nvPr/>
         </p:nvSpPr>
@@ -10394,7 +10438,7 @@
       </p:sp>
       <p:sp>
         <p:nvSpPr>
-          <p:cNvPr id="168" name="Rectangle 167"/>
+          <p:cNvPr id="169" name="Rectangle 168"/>
           <p:cNvSpPr/>
           <p:nvPr/>
         </p:nvSpPr>
@@ -10440,7 +10484,7 @@
       </p:sp>
       <p:sp>
         <p:nvSpPr>
-          <p:cNvPr id="169" name="TextBox 168"/>
+          <p:cNvPr id="170" name="TextBox 169"/>
           <p:cNvSpPr txBox="1"/>
           <p:nvPr/>
         </p:nvSpPr>
@@ -10480,7 +10524,7 @@
       </p:sp>
       <p:sp>
         <p:nvSpPr>
-          <p:cNvPr id="170" name="Rectangle 169"/>
+          <p:cNvPr id="171" name="Rectangle 170"/>
           <p:cNvSpPr/>
           <p:nvPr/>
         </p:nvSpPr>
@@ -10526,7 +10570,7 @@
       </p:sp>
       <p:sp>
         <p:nvSpPr>
-          <p:cNvPr id="171" name="TextBox 170"/>
+          <p:cNvPr id="172" name="TextBox 171"/>
           <p:cNvSpPr txBox="1"/>
           <p:nvPr/>
         </p:nvSpPr>
@@ -10566,7 +10610,7 @@
       </p:sp>
       <p:sp>
         <p:nvSpPr>
-          <p:cNvPr id="172" name="Rectangle 171"/>
+          <p:cNvPr id="173" name="Rectangle 172"/>
           <p:cNvSpPr/>
           <p:nvPr/>
         </p:nvSpPr>
@@ -10612,7 +10656,7 @@
       </p:sp>
       <p:sp>
         <p:nvSpPr>
-          <p:cNvPr id="173" name="TextBox 172"/>
+          <p:cNvPr id="174" name="TextBox 173"/>
           <p:cNvSpPr txBox="1"/>
           <p:nvPr/>
         </p:nvSpPr>
@@ -10669,7 +10713,7 @@
       </p:sp>
       <p:sp>
         <p:nvSpPr>
-          <p:cNvPr id="174" name="Rectangle 173"/>
+          <p:cNvPr id="175" name="Rectangle 174"/>
           <p:cNvSpPr/>
           <p:nvPr/>
         </p:nvSpPr>
@@ -10715,7 +10759,7 @@
       </p:sp>
       <p:sp>
         <p:nvSpPr>
-          <p:cNvPr id="175" name="TextBox 174"/>
+          <p:cNvPr id="176" name="TextBox 175"/>
           <p:cNvSpPr txBox="1"/>
           <p:nvPr/>
         </p:nvSpPr>
@@ -10755,7 +10799,7 @@
       </p:sp>
       <p:sp>
         <p:nvSpPr>
-          <p:cNvPr id="176" name="Rectangle 175"/>
+          <p:cNvPr id="177" name="Rectangle 176"/>
           <p:cNvSpPr/>
           <p:nvPr/>
         </p:nvSpPr>
@@ -10801,7 +10845,7 @@
       </p:sp>
       <p:sp>
         <p:nvSpPr>
-          <p:cNvPr id="177" name="TextBox 176"/>
+          <p:cNvPr id="178" name="TextBox 177"/>
           <p:cNvSpPr txBox="1"/>
           <p:nvPr/>
         </p:nvSpPr>
@@ -10841,7 +10885,7 @@
       </p:sp>
       <p:sp>
         <p:nvSpPr>
-          <p:cNvPr id="178" name="Rectangle 177"/>
+          <p:cNvPr id="179" name="Rectangle 178"/>
           <p:cNvSpPr/>
           <p:nvPr/>
         </p:nvSpPr>
@@ -10887,7 +10931,7 @@
       </p:sp>
       <p:sp>
         <p:nvSpPr>
-          <p:cNvPr id="179" name="TextBox 178"/>
+          <p:cNvPr id="180" name="TextBox 179"/>
           <p:cNvSpPr txBox="1"/>
           <p:nvPr/>
         </p:nvSpPr>
@@ -10927,7 +10971,7 @@
       </p:sp>
       <p:sp>
         <p:nvSpPr>
-          <p:cNvPr id="180" name="Rectangle 179"/>
+          <p:cNvPr id="181" name="Rectangle 180"/>
           <p:cNvSpPr/>
           <p:nvPr/>
         </p:nvSpPr>
@@ -10973,7 +11017,7 @@
       </p:sp>
       <p:sp>
         <p:nvSpPr>
-          <p:cNvPr id="181" name="TextBox 180"/>
+          <p:cNvPr id="182" name="TextBox 181"/>
           <p:cNvSpPr txBox="1"/>
           <p:nvPr/>
         </p:nvSpPr>
@@ -11013,7 +11057,7 @@
       </p:sp>
       <p:sp>
         <p:nvSpPr>
-          <p:cNvPr id="182" name="Rectangle 181"/>
+          <p:cNvPr id="183" name="Rectangle 182"/>
           <p:cNvSpPr/>
           <p:nvPr/>
         </p:nvSpPr>
@@ -11059,7 +11103,7 @@
       </p:sp>
       <p:sp>
         <p:nvSpPr>
-          <p:cNvPr id="183" name="TextBox 182"/>
+          <p:cNvPr id="184" name="TextBox 183"/>
           <p:cNvSpPr txBox="1"/>
           <p:nvPr/>
         </p:nvSpPr>
@@ -11099,7 +11143,7 @@
       </p:sp>
       <p:sp>
         <p:nvSpPr>
-          <p:cNvPr id="184" name="Rectangle 183"/>
+          <p:cNvPr id="185" name="Rectangle 184"/>
           <p:cNvSpPr/>
           <p:nvPr/>
         </p:nvSpPr>
@@ -11145,7 +11189,7 @@
       </p:sp>
       <p:sp>
         <p:nvSpPr>
-          <p:cNvPr id="185" name="TextBox 184"/>
+          <p:cNvPr id="186" name="TextBox 185"/>
           <p:cNvSpPr txBox="1"/>
           <p:nvPr/>
         </p:nvSpPr>
@@ -11185,7 +11229,7 @@
       </p:sp>
       <p:sp>
         <p:nvSpPr>
-          <p:cNvPr id="186" name="Rectangle 185"/>
+          <p:cNvPr id="187" name="Rectangle 186"/>
           <p:cNvSpPr/>
           <p:nvPr/>
         </p:nvSpPr>
@@ -11231,7 +11275,7 @@
       </p:sp>
       <p:sp>
         <p:nvSpPr>
-          <p:cNvPr id="187" name="TextBox 186"/>
+          <p:cNvPr id="188" name="TextBox 187"/>
           <p:cNvSpPr txBox="1"/>
           <p:nvPr/>
         </p:nvSpPr>
@@ -11271,7 +11315,7 @@
       </p:sp>
       <p:sp>
         <p:nvSpPr>
-          <p:cNvPr id="188" name="Rectangle 187"/>
+          <p:cNvPr id="189" name="Rectangle 188"/>
           <p:cNvSpPr/>
           <p:nvPr/>
         </p:nvSpPr>
@@ -11317,7 +11361,7 @@
       </p:sp>
       <p:sp>
         <p:nvSpPr>
-          <p:cNvPr id="189" name="TextBox 188"/>
+          <p:cNvPr id="190" name="TextBox 189"/>
           <p:cNvSpPr txBox="1"/>
           <p:nvPr/>
         </p:nvSpPr>
@@ -11374,7 +11418,7 @@
       </p:sp>
       <p:sp>
         <p:nvSpPr>
-          <p:cNvPr id="190" name="Rectangle 189"/>
+          <p:cNvPr id="191" name="Rectangle 190"/>
           <p:cNvSpPr/>
           <p:nvPr/>
         </p:nvSpPr>
@@ -11420,7 +11464,7 @@
       </p:sp>
       <p:sp>
         <p:nvSpPr>
-          <p:cNvPr id="191" name="TextBox 190"/>
+          <p:cNvPr id="192" name="TextBox 191"/>
           <p:cNvSpPr txBox="1"/>
           <p:nvPr/>
         </p:nvSpPr>
@@ -11460,7 +11504,7 @@
       </p:sp>
       <p:sp>
         <p:nvSpPr>
-          <p:cNvPr id="192" name="Rectangle 191"/>
+          <p:cNvPr id="193" name="Rectangle 192"/>
           <p:cNvSpPr/>
           <p:nvPr/>
         </p:nvSpPr>
@@ -11506,7 +11550,7 @@
       </p:sp>
       <p:sp>
         <p:nvSpPr>
-          <p:cNvPr id="193" name="TextBox 192"/>
+          <p:cNvPr id="194" name="TextBox 193"/>
           <p:cNvSpPr txBox="1"/>
           <p:nvPr/>
         </p:nvSpPr>
@@ -11546,7 +11590,7 @@
       </p:sp>
       <p:sp>
         <p:nvSpPr>
-          <p:cNvPr id="194" name="Rectangle 193"/>
+          <p:cNvPr id="195" name="Rectangle 194"/>
           <p:cNvSpPr/>
           <p:nvPr/>
         </p:nvSpPr>
@@ -11592,7 +11636,7 @@
       </p:sp>
       <p:sp>
         <p:nvSpPr>
-          <p:cNvPr id="195" name="TextBox 194"/>
+          <p:cNvPr id="196" name="TextBox 195"/>
           <p:cNvSpPr txBox="1"/>
           <p:nvPr/>
         </p:nvSpPr>
@@ -11632,7 +11676,7 @@
       </p:sp>
       <p:sp>
         <p:nvSpPr>
-          <p:cNvPr id="196" name="Rectangle 195"/>
+          <p:cNvPr id="197" name="Rectangle 196"/>
           <p:cNvSpPr/>
           <p:nvPr/>
         </p:nvSpPr>
@@ -11678,7 +11722,7 @@
       </p:sp>
       <p:sp>
         <p:nvSpPr>
-          <p:cNvPr id="197" name="TextBox 196"/>
+          <p:cNvPr id="198" name="TextBox 197"/>
           <p:cNvSpPr txBox="1"/>
           <p:nvPr/>
         </p:nvSpPr>
@@ -11718,7 +11762,7 @@
       </p:sp>
       <p:sp>
         <p:nvSpPr>
-          <p:cNvPr id="198" name="Rectangle 197"/>
+          <p:cNvPr id="199" name="Rectangle 198"/>
           <p:cNvSpPr/>
           <p:nvPr/>
         </p:nvSpPr>
@@ -11764,7 +11808,7 @@
       </p:sp>
       <p:sp>
         <p:nvSpPr>
-          <p:cNvPr id="199" name="TextBox 198"/>
+          <p:cNvPr id="200" name="TextBox 199"/>
           <p:cNvSpPr txBox="1"/>
           <p:nvPr/>
         </p:nvSpPr>
@@ -11804,7 +11848,7 @@
       </p:sp>
       <p:sp>
         <p:nvSpPr>
-          <p:cNvPr id="200" name="Rectangle 199"/>
+          <p:cNvPr id="201" name="Rectangle 200"/>
           <p:cNvSpPr/>
           <p:nvPr/>
         </p:nvSpPr>
@@ -11850,7 +11894,7 @@
       </p:sp>
       <p:sp>
         <p:nvSpPr>
-          <p:cNvPr id="201" name="TextBox 200"/>
+          <p:cNvPr id="202" name="TextBox 201"/>
           <p:cNvSpPr txBox="1"/>
           <p:nvPr/>
         </p:nvSpPr>
@@ -11890,7 +11934,7 @@
       </p:sp>
       <p:sp>
         <p:nvSpPr>
-          <p:cNvPr id="202" name="Rectangle 201"/>
+          <p:cNvPr id="203" name="Rectangle 202"/>
           <p:cNvSpPr/>
           <p:nvPr/>
         </p:nvSpPr>
@@ -11936,7 +11980,7 @@
       </p:sp>
       <p:sp>
         <p:nvSpPr>
-          <p:cNvPr id="203" name="TextBox 202"/>
+          <p:cNvPr id="204" name="TextBox 203"/>
           <p:cNvSpPr txBox="1"/>
           <p:nvPr/>
         </p:nvSpPr>
@@ -11976,7 +12020,7 @@
       </p:sp>
       <p:sp>
         <p:nvSpPr>
-          <p:cNvPr id="204" name="Rectangle 203"/>
+          <p:cNvPr id="205" name="Rectangle 204"/>
           <p:cNvSpPr/>
           <p:nvPr/>
         </p:nvSpPr>
@@ -12022,7 +12066,7 @@
       </p:sp>
       <p:sp>
         <p:nvSpPr>
-          <p:cNvPr id="205" name="TextBox 204"/>
+          <p:cNvPr id="206" name="TextBox 205"/>
           <p:cNvSpPr txBox="1"/>
           <p:nvPr/>
         </p:nvSpPr>
@@ -12062,7 +12106,7 @@
       </p:sp>
       <p:sp>
         <p:nvSpPr>
-          <p:cNvPr id="206" name="Rectangle 205"/>
+          <p:cNvPr id="207" name="Rectangle 206"/>
           <p:cNvSpPr/>
           <p:nvPr/>
         </p:nvSpPr>
@@ -12108,7 +12152,7 @@
       </p:sp>
       <p:sp>
         <p:nvSpPr>
-          <p:cNvPr id="207" name="TextBox 206"/>
+          <p:cNvPr id="208" name="TextBox 207"/>
           <p:cNvSpPr txBox="1"/>
           <p:nvPr/>
         </p:nvSpPr>
@@ -12165,7 +12209,7 @@
       </p:sp>
       <p:sp>
         <p:nvSpPr>
-          <p:cNvPr id="208" name="Rectangle 207"/>
+          <p:cNvPr id="209" name="Rectangle 208"/>
           <p:cNvSpPr/>
           <p:nvPr/>
         </p:nvSpPr>
@@ -12211,7 +12255,7 @@
       </p:sp>
       <p:sp>
         <p:nvSpPr>
-          <p:cNvPr id="209" name="TextBox 208"/>
+          <p:cNvPr id="210" name="TextBox 209"/>
           <p:cNvSpPr txBox="1"/>
           <p:nvPr/>
         </p:nvSpPr>
@@ -12251,7 +12295,7 @@
       </p:sp>
       <p:sp>
         <p:nvSpPr>
-          <p:cNvPr id="210" name="Rectangle 209"/>
+          <p:cNvPr id="211" name="Rectangle 210"/>
           <p:cNvSpPr/>
           <p:nvPr/>
         </p:nvSpPr>
@@ -12297,7 +12341,7 @@
       </p:sp>
       <p:sp>
         <p:nvSpPr>
-          <p:cNvPr id="211" name="TextBox 210"/>
+          <p:cNvPr id="212" name="TextBox 211"/>
           <p:cNvSpPr txBox="1"/>
           <p:nvPr/>
         </p:nvSpPr>
@@ -12337,7 +12381,7 @@
       </p:sp>
       <p:sp>
         <p:nvSpPr>
-          <p:cNvPr id="212" name="Rectangle 211"/>
+          <p:cNvPr id="213" name="Rectangle 212"/>
           <p:cNvSpPr/>
           <p:nvPr/>
         </p:nvSpPr>
@@ -12383,7 +12427,7 @@
       </p:sp>
       <p:sp>
         <p:nvSpPr>
-          <p:cNvPr id="213" name="TextBox 212"/>
+          <p:cNvPr id="214" name="TextBox 213"/>
           <p:cNvSpPr txBox="1"/>
           <p:nvPr/>
         </p:nvSpPr>
@@ -12423,7 +12467,7 @@
       </p:sp>
       <p:sp>
         <p:nvSpPr>
-          <p:cNvPr id="214" name="Rectangle 213"/>
+          <p:cNvPr id="215" name="Rectangle 214"/>
           <p:cNvSpPr/>
           <p:nvPr/>
         </p:nvSpPr>
@@ -12469,7 +12513,7 @@
       </p:sp>
       <p:sp>
         <p:nvSpPr>
-          <p:cNvPr id="215" name="TextBox 214"/>
+          <p:cNvPr id="216" name="TextBox 215"/>
           <p:cNvSpPr txBox="1"/>
           <p:nvPr/>
         </p:nvSpPr>
@@ -12509,7 +12553,7 @@
       </p:sp>
       <p:sp>
         <p:nvSpPr>
-          <p:cNvPr id="216" name="Rectangle 215"/>
+          <p:cNvPr id="217" name="Rectangle 216"/>
           <p:cNvSpPr/>
           <p:nvPr/>
         </p:nvSpPr>
@@ -12555,7 +12599,7 @@
       </p:sp>
       <p:sp>
         <p:nvSpPr>
-          <p:cNvPr id="217" name="TextBox 216"/>
+          <p:cNvPr id="218" name="TextBox 217"/>
           <p:cNvSpPr txBox="1"/>
           <p:nvPr/>
         </p:nvSpPr>
@@ -12595,7 +12639,7 @@
       </p:sp>
       <p:sp>
         <p:nvSpPr>
-          <p:cNvPr id="218" name="Rectangle 217"/>
+          <p:cNvPr id="219" name="Rectangle 218"/>
           <p:cNvSpPr/>
           <p:nvPr/>
         </p:nvSpPr>
@@ -12641,7 +12685,7 @@
       </p:sp>
       <p:sp>
         <p:nvSpPr>
-          <p:cNvPr id="219" name="TextBox 218"/>
+          <p:cNvPr id="220" name="TextBox 219"/>
           <p:cNvSpPr txBox="1"/>
           <p:nvPr/>
         </p:nvSpPr>
@@ -12681,7 +12725,7 @@
       </p:sp>
       <p:sp>
         <p:nvSpPr>
-          <p:cNvPr id="220" name="Rectangle 219"/>
+          <p:cNvPr id="221" name="Rectangle 220"/>
           <p:cNvSpPr/>
           <p:nvPr/>
         </p:nvSpPr>
@@ -12727,7 +12771,7 @@
       </p:sp>
       <p:sp>
         <p:nvSpPr>
-          <p:cNvPr id="221" name="TextBox 220"/>
+          <p:cNvPr id="222" name="TextBox 221"/>
           <p:cNvSpPr txBox="1"/>
           <p:nvPr/>
         </p:nvSpPr>
@@ -12767,7 +12811,7 @@
       </p:sp>
       <p:sp>
         <p:nvSpPr>
-          <p:cNvPr id="222" name="Rectangle 221"/>
+          <p:cNvPr id="223" name="Rectangle 222"/>
           <p:cNvSpPr/>
           <p:nvPr/>
         </p:nvSpPr>
@@ -12813,7 +12857,7 @@
       </p:sp>
       <p:sp>
         <p:nvSpPr>
-          <p:cNvPr id="223" name="TextBox 222"/>
+          <p:cNvPr id="224" name="TextBox 223"/>
           <p:cNvSpPr txBox="1"/>
           <p:nvPr/>
         </p:nvSpPr>
@@ -12870,7 +12914,7 @@
       </p:sp>
       <p:sp>
         <p:nvSpPr>
-          <p:cNvPr id="224" name="Rectangle 223"/>
+          <p:cNvPr id="225" name="Rectangle 224"/>
           <p:cNvSpPr/>
           <p:nvPr/>
         </p:nvSpPr>
@@ -12916,7 +12960,7 @@
       </p:sp>
       <p:sp>
         <p:nvSpPr>
-          <p:cNvPr id="225" name="TextBox 224"/>
+          <p:cNvPr id="226" name="TextBox 225"/>
           <p:cNvSpPr txBox="1"/>
           <p:nvPr/>
         </p:nvSpPr>
@@ -12956,7 +13000,7 @@
       </p:sp>
       <p:sp>
         <p:nvSpPr>
-          <p:cNvPr id="226" name="Rectangle 225"/>
+          <p:cNvPr id="227" name="Rectangle 226"/>
           <p:cNvSpPr/>
           <p:nvPr/>
         </p:nvSpPr>
@@ -13002,7 +13046,7 @@
       </p:sp>
       <p:sp>
         <p:nvSpPr>
-          <p:cNvPr id="227" name="TextBox 226"/>
+          <p:cNvPr id="228" name="TextBox 227"/>
           <p:cNvSpPr txBox="1"/>
           <p:nvPr/>
         </p:nvSpPr>
@@ -13042,7 +13086,7 @@
       </p:sp>
       <p:sp>
         <p:nvSpPr>
-          <p:cNvPr id="228" name="Rectangle 227"/>
+          <p:cNvPr id="229" name="Rectangle 228"/>
           <p:cNvSpPr/>
           <p:nvPr/>
         </p:nvSpPr>
@@ -13088,7 +13132,7 @@
       </p:sp>
       <p:sp>
         <p:nvSpPr>
-          <p:cNvPr id="229" name="TextBox 228"/>
+          <p:cNvPr id="230" name="TextBox 229"/>
           <p:cNvSpPr txBox="1"/>
           <p:nvPr/>
         </p:nvSpPr>
@@ -13128,7 +13172,7 @@
       </p:sp>
       <p:sp>
         <p:nvSpPr>
-          <p:cNvPr id="230" name="Rectangle 229"/>
+          <p:cNvPr id="231" name="Rectangle 230"/>
           <p:cNvSpPr/>
           <p:nvPr/>
         </p:nvSpPr>
@@ -13174,7 +13218,7 @@
       </p:sp>
       <p:sp>
         <p:nvSpPr>
-          <p:cNvPr id="231" name="TextBox 230"/>
+          <p:cNvPr id="232" name="TextBox 231"/>
           <p:cNvSpPr txBox="1"/>
           <p:nvPr/>
         </p:nvSpPr>
@@ -13214,7 +13258,7 @@
       </p:sp>
       <p:sp>
         <p:nvSpPr>
-          <p:cNvPr id="232" name="Rectangle 231"/>
+          <p:cNvPr id="233" name="Rectangle 232"/>
           <p:cNvSpPr/>
           <p:nvPr/>
         </p:nvSpPr>
@@ -13260,7 +13304,7 @@
       </p:sp>
       <p:sp>
         <p:nvSpPr>
-          <p:cNvPr id="233" name="TextBox 232"/>
+          <p:cNvPr id="234" name="TextBox 233"/>
           <p:cNvSpPr txBox="1"/>
           <p:nvPr/>
         </p:nvSpPr>
@@ -13300,7 +13344,7 @@
       </p:sp>
       <p:sp>
         <p:nvSpPr>
-          <p:cNvPr id="234" name="Rectangle 233"/>
+          <p:cNvPr id="235" name="Rectangle 234"/>
           <p:cNvSpPr/>
           <p:nvPr/>
         </p:nvSpPr>
@@ -13346,7 +13390,7 @@
       </p:sp>
       <p:sp>
         <p:nvSpPr>
-          <p:cNvPr id="235" name="TextBox 234"/>
+          <p:cNvPr id="236" name="TextBox 235"/>
           <p:cNvSpPr txBox="1"/>
           <p:nvPr/>
         </p:nvSpPr>
@@ -13386,7 +13430,7 @@
       </p:sp>
       <p:sp>
         <p:nvSpPr>
-          <p:cNvPr id="236" name="Rectangle 235"/>
+          <p:cNvPr id="237" name="Rectangle 236"/>
           <p:cNvSpPr/>
           <p:nvPr/>
         </p:nvSpPr>
@@ -13432,7 +13476,7 @@
       </p:sp>
       <p:sp>
         <p:nvSpPr>
-          <p:cNvPr id="237" name="TextBox 236"/>
+          <p:cNvPr id="238" name="TextBox 237"/>
           <p:cNvSpPr txBox="1"/>
           <p:nvPr/>
         </p:nvSpPr>
@@ -13472,7 +13516,7 @@
       </p:sp>
       <p:sp>
         <p:nvSpPr>
-          <p:cNvPr id="238" name="Rectangle 237"/>
+          <p:cNvPr id="239" name="Rectangle 238"/>
           <p:cNvSpPr/>
           <p:nvPr/>
         </p:nvSpPr>
@@ -13518,7 +13562,7 @@
       </p:sp>
       <p:sp>
         <p:nvSpPr>
-          <p:cNvPr id="239" name="TextBox 238"/>
+          <p:cNvPr id="240" name="TextBox 239"/>
           <p:cNvSpPr txBox="1"/>
           <p:nvPr/>
         </p:nvSpPr>
@@ -13575,7 +13619,7 @@
       </p:sp>
       <p:sp>
         <p:nvSpPr>
-          <p:cNvPr id="240" name="Rectangle 239"/>
+          <p:cNvPr id="241" name="Rectangle 240"/>
           <p:cNvSpPr/>
           <p:nvPr/>
         </p:nvSpPr>
@@ -13621,7 +13665,7 @@
       </p:sp>
       <p:sp>
         <p:nvSpPr>
-          <p:cNvPr id="241" name="TextBox 240"/>
+          <p:cNvPr id="242" name="TextBox 241"/>
           <p:cNvSpPr txBox="1"/>
           <p:nvPr/>
         </p:nvSpPr>
@@ -13661,7 +13705,7 @@
       </p:sp>
       <p:sp>
         <p:nvSpPr>
-          <p:cNvPr id="242" name="Rectangle 241"/>
+          <p:cNvPr id="243" name="Rectangle 242"/>
           <p:cNvSpPr/>
           <p:nvPr/>
         </p:nvSpPr>
@@ -13707,7 +13751,7 @@
       </p:sp>
       <p:sp>
         <p:nvSpPr>
-          <p:cNvPr id="243" name="TextBox 242"/>
+          <p:cNvPr id="244" name="TextBox 243"/>
           <p:cNvSpPr txBox="1"/>
           <p:nvPr/>
         </p:nvSpPr>
@@ -13747,7 +13791,7 @@
       </p:sp>
       <p:sp>
         <p:nvSpPr>
-          <p:cNvPr id="244" name="Rectangle 243"/>
+          <p:cNvPr id="245" name="Rectangle 244"/>
           <p:cNvSpPr/>
           <p:nvPr/>
         </p:nvSpPr>
@@ -13793,7 +13837,7 @@
       </p:sp>
       <p:sp>
         <p:nvSpPr>
-          <p:cNvPr id="245" name="TextBox 244"/>
+          <p:cNvPr id="246" name="TextBox 245"/>
           <p:cNvSpPr txBox="1"/>
           <p:nvPr/>
         </p:nvSpPr>
@@ -13833,7 +13877,7 @@
       </p:sp>
       <p:sp>
         <p:nvSpPr>
-          <p:cNvPr id="246" name="Rectangle 245"/>
+          <p:cNvPr id="247" name="Rectangle 246"/>
           <p:cNvSpPr/>
           <p:nvPr/>
         </p:nvSpPr>
@@ -13879,7 +13923,7 @@
       </p:sp>
       <p:sp>
         <p:nvSpPr>
-          <p:cNvPr id="247" name="TextBox 246"/>
+          <p:cNvPr id="248" name="TextBox 247"/>
           <p:cNvSpPr txBox="1"/>
           <p:nvPr/>
         </p:nvSpPr>
@@ -13919,7 +13963,7 @@
       </p:sp>
       <p:sp>
         <p:nvSpPr>
-          <p:cNvPr id="248" name="Rectangle 247"/>
+          <p:cNvPr id="249" name="Rectangle 248"/>
           <p:cNvSpPr/>
           <p:nvPr/>
         </p:nvSpPr>
@@ -13965,7 +14009,7 @@
       </p:sp>
       <p:sp>
         <p:nvSpPr>
-          <p:cNvPr id="249" name="TextBox 248"/>
+          <p:cNvPr id="250" name="TextBox 249"/>
           <p:cNvSpPr txBox="1"/>
           <p:nvPr/>
         </p:nvSpPr>
@@ -14005,7 +14049,7 @@
       </p:sp>
       <p:sp>
         <p:nvSpPr>
-          <p:cNvPr id="250" name="Rectangle 249"/>
+          <p:cNvPr id="251" name="Rectangle 250"/>
           <p:cNvSpPr/>
           <p:nvPr/>
         </p:nvSpPr>
@@ -14051,7 +14095,7 @@
       </p:sp>
       <p:sp>
         <p:nvSpPr>
-          <p:cNvPr id="251" name="TextBox 250"/>
+          <p:cNvPr id="252" name="TextBox 251"/>
           <p:cNvSpPr txBox="1"/>
           <p:nvPr/>
         </p:nvSpPr>
@@ -14091,7 +14135,7 @@
       </p:sp>
       <p:sp>
         <p:nvSpPr>
-          <p:cNvPr id="252" name="Rectangle 251"/>
+          <p:cNvPr id="253" name="Rectangle 252"/>
           <p:cNvSpPr/>
           <p:nvPr/>
         </p:nvSpPr>
@@ -14137,7 +14181,7 @@
       </p:sp>
       <p:sp>
         <p:nvSpPr>
-          <p:cNvPr id="253" name="TextBox 252"/>
+          <p:cNvPr id="254" name="TextBox 253"/>
           <p:cNvSpPr txBox="1"/>
           <p:nvPr/>
         </p:nvSpPr>
@@ -14177,7 +14221,7 @@
       </p:sp>
       <p:sp>
         <p:nvSpPr>
-          <p:cNvPr id="254" name="Rectangle 253"/>
+          <p:cNvPr id="255" name="Rectangle 254"/>
           <p:cNvSpPr/>
           <p:nvPr/>
         </p:nvSpPr>
@@ -14223,7 +14267,7 @@
       </p:sp>
       <p:sp>
         <p:nvSpPr>
-          <p:cNvPr id="255" name="TextBox 254"/>
+          <p:cNvPr id="256" name="TextBox 255"/>
           <p:cNvSpPr txBox="1"/>
           <p:nvPr/>
         </p:nvSpPr>
@@ -14263,7 +14307,7 @@
       </p:sp>
       <p:sp>
         <p:nvSpPr>
-          <p:cNvPr id="256" name="Rectangle 255"/>
+          <p:cNvPr id="257" name="Rectangle 256"/>
           <p:cNvSpPr/>
           <p:nvPr/>
         </p:nvSpPr>
@@ -14309,7 +14353,7 @@
       </p:sp>
       <p:sp>
         <p:nvSpPr>
-          <p:cNvPr id="257" name="TextBox 256"/>
+          <p:cNvPr id="258" name="TextBox 257"/>
           <p:cNvSpPr txBox="1"/>
           <p:nvPr/>
         </p:nvSpPr>
@@ -14366,7 +14410,7 @@
       </p:sp>
       <p:sp>
         <p:nvSpPr>
-          <p:cNvPr id="258" name="Rectangle 257"/>
+          <p:cNvPr id="259" name="Rectangle 258"/>
           <p:cNvSpPr/>
           <p:nvPr/>
         </p:nvSpPr>
@@ -14412,7 +14456,7 @@
       </p:sp>
       <p:sp>
         <p:nvSpPr>
-          <p:cNvPr id="259" name="TextBox 258"/>
+          <p:cNvPr id="260" name="TextBox 259"/>
           <p:cNvSpPr txBox="1"/>
           <p:nvPr/>
         </p:nvSpPr>
@@ -14452,7 +14496,7 @@
       </p:sp>
       <p:sp>
         <p:nvSpPr>
-          <p:cNvPr id="260" name="Rectangle 259"/>
+          <p:cNvPr id="261" name="Rectangle 260"/>
           <p:cNvSpPr/>
           <p:nvPr/>
         </p:nvSpPr>
@@ -14498,7 +14542,7 @@
       </p:sp>
       <p:sp>
         <p:nvSpPr>
-          <p:cNvPr id="261" name="TextBox 260"/>
+          <p:cNvPr id="262" name="TextBox 261"/>
           <p:cNvSpPr txBox="1"/>
           <p:nvPr/>
         </p:nvSpPr>
@@ -14538,7 +14582,7 @@
       </p:sp>
       <p:sp>
         <p:nvSpPr>
-          <p:cNvPr id="262" name="Rectangle 261"/>
+          <p:cNvPr id="263" name="Rectangle 262"/>
           <p:cNvSpPr/>
           <p:nvPr/>
         </p:nvSpPr>
@@ -14584,7 +14628,7 @@
       </p:sp>
       <p:sp>
         <p:nvSpPr>
-          <p:cNvPr id="263" name="TextBox 262"/>
+          <p:cNvPr id="264" name="TextBox 263"/>
           <p:cNvSpPr txBox="1"/>
           <p:nvPr/>
         </p:nvSpPr>
@@ -14624,7 +14668,7 @@
       </p:sp>
       <p:sp>
         <p:nvSpPr>
-          <p:cNvPr id="264" name="Rectangle 263"/>
+          <p:cNvPr id="265" name="Rectangle 264"/>
           <p:cNvSpPr/>
           <p:nvPr/>
         </p:nvSpPr>
@@ -14670,7 +14714,7 @@
       </p:sp>
       <p:sp>
         <p:nvSpPr>
-          <p:cNvPr id="265" name="TextBox 264"/>
+          <p:cNvPr id="266" name="TextBox 265"/>
           <p:cNvSpPr txBox="1"/>
           <p:nvPr/>
         </p:nvSpPr>
@@ -14710,7 +14754,7 @@
       </p:sp>
       <p:sp>
         <p:nvSpPr>
-          <p:cNvPr id="266" name="Rectangle 265"/>
+          <p:cNvPr id="267" name="Rectangle 266"/>
           <p:cNvSpPr/>
           <p:nvPr/>
         </p:nvSpPr>
@@ -14756,7 +14800,7 @@
       </p:sp>
       <p:sp>
         <p:nvSpPr>
-          <p:cNvPr id="267" name="TextBox 266"/>
+          <p:cNvPr id="268" name="TextBox 267"/>
           <p:cNvSpPr txBox="1"/>
           <p:nvPr/>
         </p:nvSpPr>
@@ -14796,7 +14840,7 @@
       </p:sp>
       <p:sp>
         <p:nvSpPr>
-          <p:cNvPr id="268" name="Rectangle 267"/>
+          <p:cNvPr id="269" name="Rectangle 268"/>
           <p:cNvSpPr/>
           <p:nvPr/>
         </p:nvSpPr>
@@ -14842,7 +14886,7 @@
       </p:sp>
       <p:sp>
         <p:nvSpPr>
-          <p:cNvPr id="269" name="TextBox 268"/>
+          <p:cNvPr id="270" name="TextBox 269"/>
           <p:cNvSpPr txBox="1"/>
           <p:nvPr/>
         </p:nvSpPr>
@@ -14882,7 +14926,7 @@
       </p:sp>
       <p:sp>
         <p:nvSpPr>
-          <p:cNvPr id="270" name="Rectangle 269"/>
+          <p:cNvPr id="271" name="Rectangle 270"/>
           <p:cNvSpPr/>
           <p:nvPr/>
         </p:nvSpPr>
@@ -14928,7 +14972,7 @@
       </p:sp>
       <p:sp>
         <p:nvSpPr>
-          <p:cNvPr id="271" name="TextBox 270"/>
+          <p:cNvPr id="272" name="TextBox 271"/>
           <p:cNvSpPr txBox="1"/>
           <p:nvPr/>
         </p:nvSpPr>
@@ -14968,7 +15012,7 @@
       </p:sp>
       <p:sp>
         <p:nvSpPr>
-          <p:cNvPr id="272" name="Rectangle 271"/>
+          <p:cNvPr id="273" name="Rectangle 272"/>
           <p:cNvSpPr/>
           <p:nvPr/>
         </p:nvSpPr>
@@ -15012,7 +15056,7 @@
       </p:sp>
       <p:sp>
         <p:nvSpPr>
-          <p:cNvPr id="273" name="TextBox 272"/>
+          <p:cNvPr id="274" name="TextBox 273"/>
           <p:cNvSpPr txBox="1"/>
           <p:nvPr/>
         </p:nvSpPr>
@@ -15052,7 +15096,7 @@
       </p:sp>
       <p:sp>
         <p:nvSpPr>
-          <p:cNvPr id="274" name="Rectangle 273"/>
+          <p:cNvPr id="275" name="Rectangle 274"/>
           <p:cNvSpPr/>
           <p:nvPr/>
         </p:nvSpPr>
@@ -15096,7 +15140,7 @@
       </p:sp>
       <p:sp>
         <p:nvSpPr>
-          <p:cNvPr id="275" name="TextBox 274"/>
+          <p:cNvPr id="276" name="TextBox 275"/>
           <p:cNvSpPr txBox="1"/>
           <p:nvPr/>
         </p:nvSpPr>
@@ -15153,7 +15197,7 @@
       </p:sp>
       <p:sp>
         <p:nvSpPr>
-          <p:cNvPr id="276" name="Rectangle 275"/>
+          <p:cNvPr id="277" name="Rectangle 276"/>
           <p:cNvSpPr/>
           <p:nvPr/>
         </p:nvSpPr>
@@ -15197,7 +15241,7 @@
       </p:sp>
       <p:sp>
         <p:nvSpPr>
-          <p:cNvPr id="277" name="TextBox 276"/>
+          <p:cNvPr id="278" name="TextBox 277"/>
           <p:cNvSpPr txBox="1"/>
           <p:nvPr/>
         </p:nvSpPr>
@@ -15254,7 +15298,7 @@
       </p:sp>
       <p:sp>
         <p:nvSpPr>
-          <p:cNvPr id="278" name="Rectangle 277"/>
+          <p:cNvPr id="279" name="Rectangle 278"/>
           <p:cNvSpPr/>
           <p:nvPr/>
         </p:nvSpPr>
@@ -15298,7 +15342,7 @@
       </p:sp>
       <p:sp>
         <p:nvSpPr>
-          <p:cNvPr id="279" name="TextBox 278"/>
+          <p:cNvPr id="280" name="TextBox 279"/>
           <p:cNvSpPr txBox="1"/>
           <p:nvPr/>
         </p:nvSpPr>
@@ -15355,7 +15399,7 @@
       </p:sp>
       <p:sp>
         <p:nvSpPr>
-          <p:cNvPr id="280" name="Rectangle 279"/>
+          <p:cNvPr id="281" name="Rectangle 280"/>
           <p:cNvSpPr/>
           <p:nvPr/>
         </p:nvSpPr>
@@ -15399,7 +15443,7 @@
       </p:sp>
       <p:sp>
         <p:nvSpPr>
-          <p:cNvPr id="281" name="TextBox 280"/>
+          <p:cNvPr id="282" name="TextBox 281"/>
           <p:cNvSpPr txBox="1"/>
           <p:nvPr/>
         </p:nvSpPr>
@@ -15456,7 +15500,7 @@
       </p:sp>
       <p:sp>
         <p:nvSpPr>
-          <p:cNvPr id="282" name="Rectangle 281"/>
+          <p:cNvPr id="283" name="Rectangle 282"/>
           <p:cNvSpPr/>
           <p:nvPr/>
         </p:nvSpPr>
@@ -15500,7 +15544,7 @@
       </p:sp>
       <p:sp>
         <p:nvSpPr>
-          <p:cNvPr id="283" name="TextBox 282"/>
+          <p:cNvPr id="284" name="TextBox 283"/>
           <p:cNvSpPr txBox="1"/>
           <p:nvPr/>
         </p:nvSpPr>
@@ -15557,7 +15601,7 @@
       </p:sp>
       <p:sp>
         <p:nvSpPr>
-          <p:cNvPr id="284" name="Rectangle 283"/>
+          <p:cNvPr id="285" name="Rectangle 284"/>
           <p:cNvSpPr/>
           <p:nvPr/>
         </p:nvSpPr>
@@ -15601,7 +15645,7 @@
       </p:sp>
       <p:sp>
         <p:nvSpPr>
-          <p:cNvPr id="285" name="TextBox 284"/>
+          <p:cNvPr id="286" name="TextBox 285"/>
           <p:cNvSpPr txBox="1"/>
           <p:nvPr/>
         </p:nvSpPr>
@@ -15658,7 +15702,7 @@
       </p:sp>
       <p:sp>
         <p:nvSpPr>
-          <p:cNvPr id="286" name="Rectangle 285"/>
+          <p:cNvPr id="287" name="Rectangle 286"/>
           <p:cNvSpPr/>
           <p:nvPr/>
         </p:nvSpPr>
@@ -15702,7 +15746,7 @@
       </p:sp>
       <p:sp>
         <p:nvSpPr>
-          <p:cNvPr id="287" name="TextBox 286"/>
+          <p:cNvPr id="288" name="TextBox 287"/>
           <p:cNvSpPr txBox="1"/>
           <p:nvPr/>
         </p:nvSpPr>
@@ -15742,7 +15786,7 @@
       </p:sp>
       <p:cxnSp>
         <p:nvCxnSpPr>
-          <p:cNvPr id="288" name="Connector 287"/>
+          <p:cNvPr id="289" name="Connector 288"/>
           <p:cNvCxnSpPr/>
           <p:nvPr/>
         </p:nvCxnSpPr>
@@ -15779,7 +15823,7 @@
       </p:cxnSp>
       <p:sp>
         <p:nvSpPr>
-          <p:cNvPr id="289" name="TextBox 288"/>
+          <p:cNvPr id="290" name="TextBox 289"/>
           <p:cNvSpPr txBox="1"/>
           <p:nvPr/>
         </p:nvSpPr>
